--- a/로또_분석리포트.pptx
+++ b/로또_분석리포트.pptx
@@ -1688,7 +1688,7 @@
                             <a:srgbClr val="333333"/>
                           </a:solidFill>
                         </a:rPr>
-                        <a:t>커스텀패턴</a:t>
+                        <a:t>연승패턴</a:t>
                       </a:r>
                     </a:p>
                   </a:txBody>
@@ -1727,7 +1727,7 @@
                             <a:srgbClr val="C00000"/>
                           </a:solidFill>
                         </a:rPr>
-                        <a:t>+0.94</a:t>
+                        <a:t>+0.83</a:t>
                       </a:r>
                     </a:p>
                   </a:txBody>
@@ -1766,7 +1766,7 @@
                             <a:srgbClr val="333333"/>
                           </a:solidFill>
                         </a:rPr>
-                        <a:t>17.14%</a:t>
+                        <a:t>16.16%</a:t>
                       </a:r>
                     </a:p>
                   </a:txBody>
@@ -1805,7 +1805,7 @@
                             <a:srgbClr val="333333"/>
                           </a:solidFill>
                         </a:rPr>
-                        <a:t>12/70</a:t>
+                        <a:t>16/99</a:t>
                       </a:r>
                     </a:p>
                   </a:txBody>
@@ -1924,7 +1924,7 @@
                             <a:srgbClr val="333333"/>
                           </a:solidFill>
                         </a:rPr>
-                        <a:t>연승패턴</a:t>
+                        <a:t>3의배수</a:t>
                       </a:r>
                     </a:p>
                   </a:txBody>
@@ -1963,7 +1963,7 @@
                             <a:srgbClr val="C00000"/>
                           </a:solidFill>
                         </a:rPr>
-                        <a:t>+0.83</a:t>
+                        <a:t>+0.78</a:t>
                       </a:r>
                     </a:p>
                   </a:txBody>
@@ -2002,7 +2002,7 @@
                             <a:srgbClr val="333333"/>
                           </a:solidFill>
                         </a:rPr>
-                        <a:t>16.16%</a:t>
+                        <a:t>15.11%</a:t>
                       </a:r>
                     </a:p>
                   </a:txBody>
@@ -2041,7 +2041,7 @@
                             <a:srgbClr val="333333"/>
                           </a:solidFill>
                         </a:rPr>
-                        <a:t>16/99</a:t>
+                        <a:t>34/225</a:t>
                       </a:r>
                     </a:p>
                   </a:txBody>
@@ -2160,7 +2160,7 @@
                             <a:srgbClr val="333333"/>
                           </a:solidFill>
                         </a:rPr>
-                        <a:t>3의배수</a:t>
+                        <a:t>궁합수</a:t>
                       </a:r>
                     </a:p>
                   </a:txBody>
@@ -2199,7 +2199,7 @@
                             <a:srgbClr val="C00000"/>
                           </a:solidFill>
                         </a:rPr>
-                        <a:t>+0.78</a:t>
+                        <a:t>+0.61</a:t>
                       </a:r>
                     </a:p>
                   </a:txBody>
@@ -2238,7 +2238,7 @@
                             <a:srgbClr val="333333"/>
                           </a:solidFill>
                         </a:rPr>
-                        <a:t>15.11%</a:t>
+                        <a:t>14.78%</a:t>
                       </a:r>
                     </a:p>
                   </a:txBody>
@@ -2277,7 +2277,7 @@
                             <a:srgbClr val="333333"/>
                           </a:solidFill>
                         </a:rPr>
-                        <a:t>34/225</a:t>
+                        <a:t>30/203</a:t>
                       </a:r>
                     </a:p>
                   </a:txBody>
@@ -2396,7 +2396,7 @@
                             <a:srgbClr val="333333"/>
                           </a:solidFill>
                         </a:rPr>
-                        <a:t>궁합수</a:t>
+                        <a:t>미출현</a:t>
                       </a:r>
                     </a:p>
                   </a:txBody>
@@ -2435,7 +2435,7 @@
                             <a:srgbClr val="C00000"/>
                           </a:solidFill>
                         </a:rPr>
-                        <a:t>+0.61</a:t>
+                        <a:t>+0.13</a:t>
                       </a:r>
                     </a:p>
                   </a:txBody>
@@ -2474,7 +2474,7 @@
                             <a:srgbClr val="333333"/>
                           </a:solidFill>
                         </a:rPr>
-                        <a:t>14.78%</a:t>
+                        <a:t>13.59%</a:t>
                       </a:r>
                     </a:p>
                   </a:txBody>
@@ -2513,7 +2513,7 @@
                             <a:srgbClr val="333333"/>
                           </a:solidFill>
                         </a:rPr>
-                        <a:t>30/203</a:t>
+                        <a:t>39/287</a:t>
                       </a:r>
                     </a:p>
                   </a:txBody>
@@ -2632,7 +2632,7 @@
                             <a:srgbClr val="333333"/>
                           </a:solidFill>
                         </a:rPr>
-                        <a:t>미출현</a:t>
+                        <a:t>끝수이월</a:t>
                       </a:r>
                     </a:p>
                   </a:txBody>
@@ -2671,7 +2671,7 @@
                             <a:srgbClr val="C00000"/>
                           </a:solidFill>
                         </a:rPr>
-                        <a:t>+0.13</a:t>
+                        <a:t>+0.01</a:t>
                       </a:r>
                     </a:p>
                   </a:txBody>
@@ -2710,7 +2710,7 @@
                             <a:srgbClr val="333333"/>
                           </a:solidFill>
                         </a:rPr>
-                        <a:t>13.59%</a:t>
+                        <a:t>13.35%</a:t>
                       </a:r>
                     </a:p>
                   </a:txBody>
@@ -2749,7 +2749,7 @@
                             <a:srgbClr val="333333"/>
                           </a:solidFill>
                         </a:rPr>
-                        <a:t>39/287</a:t>
+                        <a:t>45/337</a:t>
                       </a:r>
                     </a:p>
                   </a:txBody>
@@ -2865,49 +2865,10 @@
                       <a:r>
                         <a:rPr lang="ko-KR" sz="850" b="0">
                           <a:solidFill>
-                            <a:srgbClr val="333333"/>
-                          </a:solidFill>
-                        </a:rPr>
-                        <a:t>끝수이월</a:t>
-                      </a:r>
-                    </a:p>
-                  </a:txBody>
-                  <a:tcPr anchor="ctr" marL="0" marR="0" marT="0" marB="0">
-                    <a:lnL w="6350">
-                      <a:solidFill>
-                        <a:srgbClr val="BBBBBB"/>
-                      </a:solidFill>
-                    </a:lnL>
-                    <a:lnR w="6350">
-                      <a:solidFill>
-                        <a:srgbClr val="BBBBBB"/>
-                      </a:solidFill>
-                    </a:lnR>
-                    <a:lnT w="6350">
-                      <a:solidFill>
-                        <a:srgbClr val="BBBBBB"/>
-                      </a:solidFill>
-                    </a:lnT>
-                    <a:lnB w="6350">
-                      <a:solidFill>
-                        <a:srgbClr val="BBBBBB"/>
-                      </a:solidFill>
-                    </a:lnB>
-                  </a:tcPr>
-                </a:tc>
-                <a:tc>
-                  <a:txBody>
-                    <a:bodyPr lIns="9525" rIns="9525" tIns="6350" bIns="6350" anchor="ctr"/>
-                    <a:lstStyle/>
-                    <a:p>
-                      <a:pPr algn="ctr"/>
-                      <a:r>
-                        <a:rPr lang="ko-KR" sz="850" b="1">
-                          <a:solidFill>
-                            <a:srgbClr val="C00000"/>
-                          </a:solidFill>
-                        </a:rPr>
-                        <a:t>+0.01</a:t>
+                            <a:srgbClr val="AAAAAA"/>
+                          </a:solidFill>
+                        </a:rPr>
+                        <a:t>누적빈도</a:t>
                       </a:r>
                     </a:p>
                   </a:txBody>
@@ -2943,10 +2904,10 @@
                       <a:r>
                         <a:rPr lang="ko-KR" sz="850" b="0">
                           <a:solidFill>
-                            <a:srgbClr val="333333"/>
-                          </a:solidFill>
-                        </a:rPr>
-                        <a:t>13.35%</a:t>
+                            <a:srgbClr val="AAAAAA"/>
+                          </a:solidFill>
+                        </a:rPr>
+                        <a:t>+0.00</a:t>
                       </a:r>
                     </a:p>
                   </a:txBody>
@@ -2985,7 +2946,7 @@
                             <a:srgbClr val="333333"/>
                           </a:solidFill>
                         </a:rPr>
-                        <a:t>45/337</a:t>
+                        <a:t>13.33%</a:t>
                       </a:r>
                     </a:p>
                   </a:txBody>
@@ -3021,10 +2982,49 @@
                       <a:r>
                         <a:rPr lang="ko-KR" sz="850" b="0">
                           <a:solidFill>
-                            <a:srgbClr val="1F3864"/>
-                          </a:solidFill>
-                        </a:rPr>
-                        <a:t>○</a:t>
+                            <a:srgbClr val="333333"/>
+                          </a:solidFill>
+                        </a:rPr>
+                        <a:t>90/675</a:t>
+                      </a:r>
+                    </a:p>
+                  </a:txBody>
+                  <a:tcPr anchor="ctr" marL="0" marR="0" marT="0" marB="0">
+                    <a:lnL w="6350">
+                      <a:solidFill>
+                        <a:srgbClr val="BBBBBB"/>
+                      </a:solidFill>
+                    </a:lnL>
+                    <a:lnR w="6350">
+                      <a:solidFill>
+                        <a:srgbClr val="BBBBBB"/>
+                      </a:solidFill>
+                    </a:lnR>
+                    <a:lnT w="6350">
+                      <a:solidFill>
+                        <a:srgbClr val="BBBBBB"/>
+                      </a:solidFill>
+                    </a:lnT>
+                    <a:lnB w="6350">
+                      <a:solidFill>
+                        <a:srgbClr val="BBBBBB"/>
+                      </a:solidFill>
+                    </a:lnB>
+                  </a:tcPr>
+                </a:tc>
+                <a:tc>
+                  <a:txBody>
+                    <a:bodyPr lIns="9525" rIns="9525" tIns="6350" bIns="6350" anchor="ctr"/>
+                    <a:lstStyle/>
+                    <a:p>
+                      <a:pPr algn="ctr"/>
+                      <a:r>
+                        <a:rPr lang="ko-KR" sz="850" b="0">
+                          <a:solidFill>
+                            <a:srgbClr val="C0C0C0"/>
+                          </a:solidFill>
+                        </a:rPr>
+                        <a:t>×</a:t>
                       </a:r>
                     </a:p>
                   </a:txBody>
@@ -3104,7 +3104,7 @@
                             <a:srgbClr val="AAAAAA"/>
                           </a:solidFill>
                         </a:rPr>
-                        <a:t>누적빈도</a:t>
+                        <a:t>합계균형</a:t>
                       </a:r>
                     </a:p>
                   </a:txBody>
@@ -3221,7 +3221,7 @@
                             <a:srgbClr val="333333"/>
                           </a:solidFill>
                         </a:rPr>
-                        <a:t>90/675</a:t>
+                        <a:t>70/525</a:t>
                       </a:r>
                     </a:p>
                   </a:txBody>
@@ -3340,7 +3340,7 @@
                             <a:srgbClr val="AAAAAA"/>
                           </a:solidFill>
                         </a:rPr>
-                        <a:t>합계균형</a:t>
+                        <a:t>끝수통계</a:t>
                       </a:r>
                     </a:p>
                   </a:txBody>
@@ -3457,7 +3457,7 @@
                             <a:srgbClr val="333333"/>
                           </a:solidFill>
                         </a:rPr>
-                        <a:t>70/525</a:t>
+                        <a:t>90/675</a:t>
                       </a:r>
                     </a:p>
                   </a:txBody>
@@ -3576,7 +3576,7 @@
                             <a:srgbClr val="AAAAAA"/>
                           </a:solidFill>
                         </a:rPr>
-                        <a:t>끝수통계</a:t>
+                        <a:t>AC패턴</a:t>
                       </a:r>
                     </a:p>
                   </a:txBody>
@@ -3812,7 +3812,7 @@
                             <a:srgbClr val="AAAAAA"/>
                           </a:solidFill>
                         </a:rPr>
-                        <a:t>AC패턴</a:t>
+                        <a:t>번호대빈도</a:t>
                       </a:r>
                     </a:p>
                   </a:txBody>
@@ -4048,7 +4048,7 @@
                             <a:srgbClr val="AAAAAA"/>
                           </a:solidFill>
                         </a:rPr>
-                        <a:t>번호대빈도</a:t>
+                        <a:t>고저균형</a:t>
                       </a:r>
                     </a:p>
                   </a:txBody>
@@ -4087,7 +4087,7 @@
                             <a:srgbClr val="AAAAAA"/>
                           </a:solidFill>
                         </a:rPr>
-                        <a:t>+0.00</a:t>
+                        <a:t>-0.40</a:t>
                       </a:r>
                     </a:p>
                   </a:txBody>
@@ -4126,7 +4126,7 @@
                             <a:srgbClr val="333333"/>
                           </a:solidFill>
                         </a:rPr>
-                        <a:t>13.33%</a:t>
+                        <a:t>12.38%</a:t>
                       </a:r>
                     </a:p>
                   </a:txBody>
@@ -4165,7 +4165,7 @@
                             <a:srgbClr val="333333"/>
                           </a:solidFill>
                         </a:rPr>
-                        <a:t>90/675</a:t>
+                        <a:t>25/202</a:t>
                       </a:r>
                     </a:p>
                   </a:txBody>
@@ -4284,7 +4284,7 @@
                             <a:srgbClr val="AAAAAA"/>
                           </a:solidFill>
                         </a:rPr>
-                        <a:t>고저균형</a:t>
+                        <a:t>이웃수(주기)</a:t>
                       </a:r>
                     </a:p>
                   </a:txBody>
@@ -4323,7 +4323,7 @@
                             <a:srgbClr val="AAAAAA"/>
                           </a:solidFill>
                         </a:rPr>
-                        <a:t>-0.40</a:t>
+                        <a:t>-0.54</a:t>
                       </a:r>
                     </a:p>
                   </a:txBody>
@@ -4362,7 +4362,7 @@
                             <a:srgbClr val="333333"/>
                           </a:solidFill>
                         </a:rPr>
-                        <a:t>12.38%</a:t>
+                        <a:t>10.00%</a:t>
                       </a:r>
                     </a:p>
                   </a:txBody>
@@ -4401,7 +4401,7 @@
                             <a:srgbClr val="333333"/>
                           </a:solidFill>
                         </a:rPr>
-                        <a:t>25/202</a:t>
+                        <a:t>3/30</a:t>
                       </a:r>
                     </a:p>
                   </a:txBody>
@@ -4520,7 +4520,7 @@
                             <a:srgbClr val="AAAAAA"/>
                           </a:solidFill>
                         </a:rPr>
-                        <a:t>이웃수(주기)</a:t>
+                        <a:t>멸구간(주기)</a:t>
                       </a:r>
                     </a:p>
                   </a:txBody>
@@ -4559,7 +4559,7 @@
                             <a:srgbClr val="AAAAAA"/>
                           </a:solidFill>
                         </a:rPr>
-                        <a:t>-0.54</a:t>
+                        <a:t>-0.57</a:t>
                       </a:r>
                     </a:p>
                   </a:txBody>
@@ -4598,7 +4598,7 @@
                             <a:srgbClr val="333333"/>
                           </a:solidFill>
                         </a:rPr>
-                        <a:t>10.00%</a:t>
+                        <a:t>12.38%</a:t>
                       </a:r>
                     </a:p>
                   </a:txBody>
@@ -4637,7 +4637,7 @@
                             <a:srgbClr val="333333"/>
                           </a:solidFill>
                         </a:rPr>
-                        <a:t>3/30</a:t>
+                        <a:t>51/412</a:t>
                       </a:r>
                     </a:p>
                   </a:txBody>
@@ -4756,7 +4756,7 @@
                             <a:srgbClr val="AAAAAA"/>
                           </a:solidFill>
                         </a:rPr>
-                        <a:t>멸구간(주기)</a:t>
+                        <a:t>소수</a:t>
                       </a:r>
                     </a:p>
                   </a:txBody>
@@ -4795,7 +4795,7 @@
                             <a:srgbClr val="AAAAAA"/>
                           </a:solidFill>
                         </a:rPr>
-                        <a:t>-0.57</a:t>
+                        <a:t>-0.61</a:t>
                       </a:r>
                     </a:p>
                   </a:txBody>
@@ -4834,7 +4834,7 @@
                             <a:srgbClr val="333333"/>
                           </a:solidFill>
                         </a:rPr>
-                        <a:t>12.38%</a:t>
+                        <a:t>11.90%</a:t>
                       </a:r>
                     </a:p>
                   </a:txBody>
@@ -4873,7 +4873,7 @@
                             <a:srgbClr val="333333"/>
                           </a:solidFill>
                         </a:rPr>
-                        <a:t>51/412</a:t>
+                        <a:t>25/210</a:t>
                       </a:r>
                     </a:p>
                   </a:txBody>
@@ -4992,7 +4992,7 @@
                             <a:srgbClr val="AAAAAA"/>
                           </a:solidFill>
                         </a:rPr>
-                        <a:t>소수</a:t>
+                        <a:t>홀짝균형</a:t>
                       </a:r>
                     </a:p>
                   </a:txBody>
@@ -5031,7 +5031,7 @@
                             <a:srgbClr val="AAAAAA"/>
                           </a:solidFill>
                         </a:rPr>
-                        <a:t>-0.61</a:t>
+                        <a:t>-0.74</a:t>
                       </a:r>
                     </a:p>
                   </a:txBody>
@@ -5070,7 +5070,7 @@
                             <a:srgbClr val="333333"/>
                           </a:solidFill>
                         </a:rPr>
-                        <a:t>11.90%</a:t>
+                        <a:t>11.66%</a:t>
                       </a:r>
                     </a:p>
                   </a:txBody>
@@ -5109,7 +5109,7 @@
                             <a:srgbClr val="333333"/>
                           </a:solidFill>
                         </a:rPr>
-                        <a:t>25/210</a:t>
+                        <a:t>26/223</a:t>
                       </a:r>
                     </a:p>
                   </a:txBody>
@@ -5228,7 +5228,7 @@
                             <a:srgbClr val="AAAAAA"/>
                           </a:solidFill>
                         </a:rPr>
-                        <a:t>홀짝균형</a:t>
+                        <a:t>커스텀패턴</a:t>
                       </a:r>
                     </a:p>
                   </a:txBody>
@@ -5267,7 +5267,7 @@
                             <a:srgbClr val="AAAAAA"/>
                           </a:solidFill>
                         </a:rPr>
-                        <a:t>-0.74</a:t>
+                        <a:t>-0.78</a:t>
                       </a:r>
                     </a:p>
                   </a:txBody>
@@ -5306,7 +5306,7 @@
                             <a:srgbClr val="333333"/>
                           </a:solidFill>
                         </a:rPr>
-                        <a:t>11.66%</a:t>
+                        <a:t>10.14%</a:t>
                       </a:r>
                     </a:p>
                   </a:txBody>
@@ -5345,7 +5345,7 @@
                             <a:srgbClr val="333333"/>
                           </a:solidFill>
                         </a:rPr>
-                        <a:t>26/223</a:t>
+                        <a:t>7/69</a:t>
                       </a:r>
                     </a:p>
                   </a:txBody>
@@ -6354,7 +6354,7 @@
                             <a:srgbClr val="333333"/>
                           </a:solidFill>
                         </a:rPr>
-                        <a:t>158</a:t>
+                        <a:t>154</a:t>
                       </a:r>
                     </a:p>
                   </a:txBody>
@@ -6393,7 +6393,7 @@
                             <a:srgbClr val="333333"/>
                           </a:solidFill>
                         </a:rPr>
-                        <a:t>13.17%</a:t>
+                        <a:t>12.83%</a:t>
                       </a:r>
                     </a:p>
                   </a:txBody>
@@ -6592,7 +6592,7 @@
                             <a:srgbClr val="333333"/>
                           </a:solidFill>
                         </a:rPr>
-                        <a:t>142</a:t>
+                        <a:t>140</a:t>
                       </a:r>
                     </a:p>
                   </a:txBody>
@@ -6631,7 +6631,7 @@
                             <a:srgbClr val="333333"/>
                           </a:solidFill>
                         </a:rPr>
-                        <a:t>11.83%</a:t>
+                        <a:t>11.67%</a:t>
                       </a:r>
                     </a:p>
                   </a:txBody>
@@ -6711,7 +6711,7 @@
                             <a:srgbClr val="333333"/>
                           </a:solidFill>
                         </a:rPr>
-                        <a:t>146</a:t>
+                        <a:t>147</a:t>
                       </a:r>
                     </a:p>
                   </a:txBody>
@@ -6750,7 +6750,7 @@
                             <a:srgbClr val="333333"/>
                           </a:solidFill>
                         </a:rPr>
-                        <a:t>12.17%</a:t>
+                        <a:t>12.25%</a:t>
                       </a:r>
                     </a:p>
                   </a:txBody>
@@ -6830,7 +6830,7 @@
                             <a:srgbClr val="333333"/>
                           </a:solidFill>
                         </a:rPr>
-                        <a:t>120</a:t>
+                        <a:t>129</a:t>
                       </a:r>
                     </a:p>
                   </a:txBody>
@@ -6869,7 +6869,7 @@
                             <a:srgbClr val="333333"/>
                           </a:solidFill>
                         </a:rPr>
-                        <a:t>10.00%</a:t>
+                        <a:t>10.75%</a:t>
                       </a:r>
                     </a:p>
                   </a:txBody>
@@ -6949,7 +6949,7 @@
                             <a:srgbClr val="333333"/>
                           </a:solidFill>
                         </a:rPr>
-                        <a:t>132</a:t>
+                        <a:t>133</a:t>
                       </a:r>
                     </a:p>
                   </a:txBody>
@@ -6988,7 +6988,7 @@
                             <a:srgbClr val="333333"/>
                           </a:solidFill>
                         </a:rPr>
-                        <a:t>11.00%</a:t>
+                        <a:t>11.08%</a:t>
                       </a:r>
                     </a:p>
                   </a:txBody>
@@ -7068,7 +7068,7 @@
                             <a:srgbClr val="333333"/>
                           </a:solidFill>
                         </a:rPr>
-                        <a:t>138</a:t>
+                        <a:t>127</a:t>
                       </a:r>
                     </a:p>
                   </a:txBody>
@@ -7107,7 +7107,7 @@
                             <a:srgbClr val="333333"/>
                           </a:solidFill>
                         </a:rPr>
-                        <a:t>11.50%</a:t>
+                        <a:t>10.58%</a:t>
                       </a:r>
                     </a:p>
                   </a:txBody>
@@ -7187,7 +7187,7 @@
                             <a:srgbClr val="333333"/>
                           </a:solidFill>
                         </a:rPr>
-                        <a:t>115</a:t>
+                        <a:t>121</a:t>
                       </a:r>
                     </a:p>
                   </a:txBody>
@@ -7226,7 +7226,7 @@
                             <a:srgbClr val="333333"/>
                           </a:solidFill>
                         </a:rPr>
-                        <a:t>9.58%</a:t>
+                        <a:t>10.08%</a:t>
                       </a:r>
                     </a:p>
                   </a:txBody>
@@ -7737,7 +7737,7 @@
                             <a:srgbClr val="BF8F00"/>
                           </a:solidFill>
                         </a:rPr>
-                        <a:t>30</a:t>
+                        <a:t>24</a:t>
                       </a:r>
                     </a:p>
                   </a:txBody>
@@ -7779,7 +7779,7 @@
                             <a:srgbClr val="333333"/>
                           </a:solidFill>
                         </a:rPr>
-                        <a:t>4.83</a:t>
+                        <a:t>4.70</a:t>
                       </a:r>
                     </a:p>
                   </a:txBody>
@@ -7898,7 +7898,7 @@
                             <a:srgbClr val="BF8F00"/>
                           </a:solidFill>
                         </a:rPr>
-                        <a:t>24</a:t>
+                        <a:t>30</a:t>
                       </a:r>
                     </a:p>
                   </a:txBody>
@@ -7940,7 +7940,7 @@
                             <a:srgbClr val="333333"/>
                           </a:solidFill>
                         </a:rPr>
-                        <a:t>4.71</a:t>
+                        <a:t>3.90</a:t>
                       </a:r>
                     </a:p>
                   </a:txBody>
@@ -8059,7 +8059,7 @@
                             <a:srgbClr val="BF8F00"/>
                           </a:solidFill>
                         </a:rPr>
-                        <a:t>34</a:t>
+                        <a:t>36</a:t>
                       </a:r>
                     </a:p>
                   </a:txBody>
@@ -8101,7 +8101,7 @@
                             <a:srgbClr val="333333"/>
                           </a:solidFill>
                         </a:rPr>
-                        <a:t>3.99</a:t>
+                        <a:t>3.63</a:t>
                       </a:r>
                     </a:p>
                   </a:txBody>
@@ -8140,7 +8140,7 @@
                             <a:srgbClr val="808080"/>
                           </a:solidFill>
                         </a:rPr>
-                        <a:t>미출현, 출현주기,…</a:t>
+                        <a:t>미출현, 3의배수,…</a:t>
                       </a:r>
                     </a:p>
                   </a:txBody>
@@ -8217,34 +8217,37 @@
                       <a:r>
                         <a:rPr lang="ko-KR" sz="900" b="1">
                           <a:solidFill>
-                            <a:srgbClr val="1F3864"/>
-                          </a:solidFill>
-                        </a:rPr>
-                        <a:t>36</a:t>
-                      </a:r>
-                    </a:p>
-                  </a:txBody>
-                  <a:tcPr anchor="ctr" marL="0" marR="0" marT="0" marB="0">
-                    <a:lnL w="6350">
-                      <a:solidFill>
-                        <a:srgbClr val="BBBBBB"/>
-                      </a:solidFill>
-                    </a:lnL>
-                    <a:lnR w="6350">
-                      <a:solidFill>
-                        <a:srgbClr val="BBBBBB"/>
-                      </a:solidFill>
-                    </a:lnR>
-                    <a:lnT w="6350">
-                      <a:solidFill>
-                        <a:srgbClr val="BBBBBB"/>
-                      </a:solidFill>
-                    </a:lnT>
-                    <a:lnB w="6350">
-                      <a:solidFill>
-                        <a:srgbClr val="BBBBBB"/>
-                      </a:solidFill>
-                    </a:lnB>
+                            <a:srgbClr val="BF8F00"/>
+                          </a:solidFill>
+                        </a:rPr>
+                        <a:t>15</a:t>
+                      </a:r>
+                    </a:p>
+                  </a:txBody>
+                  <a:tcPr anchor="ctr" marL="0" marR="0" marT="0" marB="0">
+                    <a:lnL w="6350">
+                      <a:solidFill>
+                        <a:srgbClr val="BBBBBB"/>
+                      </a:solidFill>
+                    </a:lnL>
+                    <a:lnR w="6350">
+                      <a:solidFill>
+                        <a:srgbClr val="BBBBBB"/>
+                      </a:solidFill>
+                    </a:lnR>
+                    <a:lnT w="6350">
+                      <a:solidFill>
+                        <a:srgbClr val="BBBBBB"/>
+                      </a:solidFill>
+                    </a:lnT>
+                    <a:lnB w="6350">
+                      <a:solidFill>
+                        <a:srgbClr val="BBBBBB"/>
+                      </a:solidFill>
+                    </a:lnB>
+                    <a:solidFill>
+                      <a:srgbClr val="FFF2CC"/>
+                    </a:solidFill>
                   </a:tcPr>
                 </a:tc>
                 <a:tc>
@@ -8259,7 +8262,7 @@
                             <a:srgbClr val="333333"/>
                           </a:solidFill>
                         </a:rPr>
-                        <a:t>3.63</a:t>
+                        <a:t>3.54</a:t>
                       </a:r>
                     </a:p>
                   </a:txBody>
@@ -8378,7 +8381,7 @@
                             <a:srgbClr val="BF8F00"/>
                           </a:solidFill>
                         </a:rPr>
-                        <a:t>15</a:t>
+                        <a:t>23</a:t>
                       </a:r>
                     </a:p>
                   </a:txBody>
@@ -8420,7 +8423,7 @@
                             <a:srgbClr val="333333"/>
                           </a:solidFill>
                         </a:rPr>
-                        <a:t>3.54</a:t>
+                        <a:t>3.41</a:t>
                       </a:r>
                     </a:p>
                   </a:txBody>
@@ -8459,7 +8462,7 @@
                             <a:srgbClr val="808080"/>
                           </a:solidFill>
                         </a:rPr>
-                        <a:t>미출현, 3의배수,…</a:t>
+                        <a:t>미출현, 출현주기,…</a:t>
                       </a:r>
                     </a:p>
                   </a:txBody>
@@ -8536,37 +8539,34 @@
                       <a:r>
                         <a:rPr lang="ko-KR" sz="900" b="1">
                           <a:solidFill>
-                            <a:srgbClr val="BF8F00"/>
-                          </a:solidFill>
-                        </a:rPr>
-                        <a:t>23</a:t>
-                      </a:r>
-                    </a:p>
-                  </a:txBody>
-                  <a:tcPr anchor="ctr" marL="0" marR="0" marT="0" marB="0">
-                    <a:lnL w="6350">
-                      <a:solidFill>
-                        <a:srgbClr val="BBBBBB"/>
-                      </a:solidFill>
-                    </a:lnL>
-                    <a:lnR w="6350">
-                      <a:solidFill>
-                        <a:srgbClr val="BBBBBB"/>
-                      </a:solidFill>
-                    </a:lnR>
-                    <a:lnT w="6350">
-                      <a:solidFill>
-                        <a:srgbClr val="BBBBBB"/>
-                      </a:solidFill>
-                    </a:lnT>
-                    <a:lnB w="6350">
-                      <a:solidFill>
-                        <a:srgbClr val="BBBBBB"/>
-                      </a:solidFill>
-                    </a:lnB>
-                    <a:solidFill>
-                      <a:srgbClr val="FFF2CC"/>
-                    </a:solidFill>
+                            <a:srgbClr val="1F3864"/>
+                          </a:solidFill>
+                        </a:rPr>
+                        <a:t>27</a:t>
+                      </a:r>
+                    </a:p>
+                  </a:txBody>
+                  <a:tcPr anchor="ctr" marL="0" marR="0" marT="0" marB="0">
+                    <a:lnL w="6350">
+                      <a:solidFill>
+                        <a:srgbClr val="BBBBBB"/>
+                      </a:solidFill>
+                    </a:lnL>
+                    <a:lnR w="6350">
+                      <a:solidFill>
+                        <a:srgbClr val="BBBBBB"/>
+                      </a:solidFill>
+                    </a:lnR>
+                    <a:lnT w="6350">
+                      <a:solidFill>
+                        <a:srgbClr val="BBBBBB"/>
+                      </a:solidFill>
+                    </a:lnT>
+                    <a:lnB w="6350">
+                      <a:solidFill>
+                        <a:srgbClr val="BBBBBB"/>
+                      </a:solidFill>
+                    </a:lnB>
                   </a:tcPr>
                 </a:tc>
                 <a:tc>
@@ -8581,7 +8581,7 @@
                             <a:srgbClr val="333333"/>
                           </a:solidFill>
                         </a:rPr>
-                        <a:t>3.33</a:t>
+                        <a:t>3.18</a:t>
                       </a:r>
                     </a:p>
                   </a:txBody>
@@ -8620,7 +8620,7 @@
                             <a:srgbClr val="808080"/>
                           </a:solidFill>
                         </a:rPr>
-                        <a:t>미출현, 출현주기,…</a:t>
+                        <a:t>3의배수, 합계균형…</a:t>
                       </a:r>
                     </a:p>
                   </a:txBody>
@@ -8700,7 +8700,7 @@
                             <a:srgbClr val="BF8F00"/>
                           </a:solidFill>
                         </a:rPr>
-                        <a:t>18</a:t>
+                        <a:t>31</a:t>
                       </a:r>
                     </a:p>
                   </a:txBody>
@@ -8742,7 +8742,7 @@
                             <a:srgbClr val="333333"/>
                           </a:solidFill>
                         </a:rPr>
-                        <a:t>3.32</a:t>
+                        <a:t>3.10</a:t>
                       </a:r>
                     </a:p>
                   </a:txBody>
@@ -8781,7 +8781,7 @@
                             <a:srgbClr val="808080"/>
                           </a:solidFill>
                         </a:rPr>
-                        <a:t>3의배수, 합계균형…</a:t>
+                        <a:t>미출현, 출현주기,…</a:t>
                       </a:r>
                     </a:p>
                   </a:txBody>
@@ -8858,37 +8858,34 @@
                       <a:r>
                         <a:rPr lang="ko-KR" sz="900" b="1">
                           <a:solidFill>
-                            <a:srgbClr val="BF8F00"/>
-                          </a:solidFill>
-                        </a:rPr>
-                        <a:t>27</a:t>
-                      </a:r>
-                    </a:p>
-                  </a:txBody>
-                  <a:tcPr anchor="ctr" marL="0" marR="0" marT="0" marB="0">
-                    <a:lnL w="6350">
-                      <a:solidFill>
-                        <a:srgbClr val="BBBBBB"/>
-                      </a:solidFill>
-                    </a:lnL>
-                    <a:lnR w="6350">
-                      <a:solidFill>
-                        <a:srgbClr val="BBBBBB"/>
-                      </a:solidFill>
-                    </a:lnR>
-                    <a:lnT w="6350">
-                      <a:solidFill>
-                        <a:srgbClr val="BBBBBB"/>
-                      </a:solidFill>
-                    </a:lnT>
-                    <a:lnB w="6350">
-                      <a:solidFill>
-                        <a:srgbClr val="BBBBBB"/>
-                      </a:solidFill>
-                    </a:lnB>
-                    <a:solidFill>
-                      <a:srgbClr val="FFF2CC"/>
-                    </a:solidFill>
+                            <a:srgbClr val="1F3864"/>
+                          </a:solidFill>
+                        </a:rPr>
+                        <a:t>34</a:t>
+                      </a:r>
+                    </a:p>
+                  </a:txBody>
+                  <a:tcPr anchor="ctr" marL="0" marR="0" marT="0" marB="0">
+                    <a:lnL w="6350">
+                      <a:solidFill>
+                        <a:srgbClr val="BBBBBB"/>
+                      </a:solidFill>
+                    </a:lnL>
+                    <a:lnR w="6350">
+                      <a:solidFill>
+                        <a:srgbClr val="BBBBBB"/>
+                      </a:solidFill>
+                    </a:lnR>
+                    <a:lnT w="6350">
+                      <a:solidFill>
+                        <a:srgbClr val="BBBBBB"/>
+                      </a:solidFill>
+                    </a:lnT>
+                    <a:lnB w="6350">
+                      <a:solidFill>
+                        <a:srgbClr val="BBBBBB"/>
+                      </a:solidFill>
+                    </a:lnB>
                   </a:tcPr>
                 </a:tc>
                 <a:tc>
@@ -8903,7 +8900,7 @@
                             <a:srgbClr val="333333"/>
                           </a:solidFill>
                         </a:rPr>
-                        <a:t>3.18</a:t>
+                        <a:t>2.98</a:t>
                       </a:r>
                     </a:p>
                   </a:txBody>
@@ -8942,7 +8939,7 @@
                             <a:srgbClr val="808080"/>
                           </a:solidFill>
                         </a:rPr>
-                        <a:t>3의배수, 합계균형…</a:t>
+                        <a:t>미출현, 출현주기,…</a:t>
                       </a:r>
                     </a:p>
                   </a:txBody>
@@ -9019,37 +9016,34 @@
                       <a:r>
                         <a:rPr lang="ko-KR" sz="900" b="1">
                           <a:solidFill>
-                            <a:srgbClr val="BF8F00"/>
-                          </a:solidFill>
-                        </a:rPr>
-                        <a:t>31</a:t>
-                      </a:r>
-                    </a:p>
-                  </a:txBody>
-                  <a:tcPr anchor="ctr" marL="0" marR="0" marT="0" marB="0">
-                    <a:lnL w="6350">
-                      <a:solidFill>
-                        <a:srgbClr val="BBBBBB"/>
-                      </a:solidFill>
-                    </a:lnL>
-                    <a:lnR w="6350">
-                      <a:solidFill>
-                        <a:srgbClr val="BBBBBB"/>
-                      </a:solidFill>
-                    </a:lnR>
-                    <a:lnT w="6350">
-                      <a:solidFill>
-                        <a:srgbClr val="BBBBBB"/>
-                      </a:solidFill>
-                    </a:lnT>
-                    <a:lnB w="6350">
-                      <a:solidFill>
-                        <a:srgbClr val="BBBBBB"/>
-                      </a:solidFill>
-                    </a:lnB>
-                    <a:solidFill>
-                      <a:srgbClr val="FFF2CC"/>
-                    </a:solidFill>
+                            <a:srgbClr val="1F3864"/>
+                          </a:solidFill>
+                        </a:rPr>
+                        <a:t>29</a:t>
+                      </a:r>
+                    </a:p>
+                  </a:txBody>
+                  <a:tcPr anchor="ctr" marL="0" marR="0" marT="0" marB="0">
+                    <a:lnL w="6350">
+                      <a:solidFill>
+                        <a:srgbClr val="BBBBBB"/>
+                      </a:solidFill>
+                    </a:lnL>
+                    <a:lnR w="6350">
+                      <a:solidFill>
+                        <a:srgbClr val="BBBBBB"/>
+                      </a:solidFill>
+                    </a:lnR>
+                    <a:lnT w="6350">
+                      <a:solidFill>
+                        <a:srgbClr val="BBBBBB"/>
+                      </a:solidFill>
+                    </a:lnT>
+                    <a:lnB w="6350">
+                      <a:solidFill>
+                        <a:srgbClr val="BBBBBB"/>
+                      </a:solidFill>
+                    </a:lnB>
                   </a:tcPr>
                 </a:tc>
                 <a:tc>
@@ -9064,7 +9058,7 @@
                             <a:srgbClr val="333333"/>
                           </a:solidFill>
                         </a:rPr>
-                        <a:t>3.10</a:t>
+                        <a:t>2.95</a:t>
                       </a:r>
                     </a:p>
                   </a:txBody>
@@ -9180,34 +9174,37 @@
                       <a:r>
                         <a:rPr lang="ko-KR" sz="900" b="1">
                           <a:solidFill>
-                            <a:srgbClr val="1F3864"/>
-                          </a:solidFill>
-                        </a:rPr>
-                        <a:t>29</a:t>
-                      </a:r>
-                    </a:p>
-                  </a:txBody>
-                  <a:tcPr anchor="ctr" marL="0" marR="0" marT="0" marB="0">
-                    <a:lnL w="6350">
-                      <a:solidFill>
-                        <a:srgbClr val="BBBBBB"/>
-                      </a:solidFill>
-                    </a:lnL>
-                    <a:lnR w="6350">
-                      <a:solidFill>
-                        <a:srgbClr val="BBBBBB"/>
-                      </a:solidFill>
-                    </a:lnR>
-                    <a:lnT w="6350">
-                      <a:solidFill>
-                        <a:srgbClr val="BBBBBB"/>
-                      </a:solidFill>
-                    </a:lnT>
-                    <a:lnB w="6350">
-                      <a:solidFill>
-                        <a:srgbClr val="BBBBBB"/>
-                      </a:solidFill>
-                    </a:lnB>
+                            <a:srgbClr val="BF8F00"/>
+                          </a:solidFill>
+                        </a:rPr>
+                        <a:t>3</a:t>
+                      </a:r>
+                    </a:p>
+                  </a:txBody>
+                  <a:tcPr anchor="ctr" marL="0" marR="0" marT="0" marB="0">
+                    <a:lnL w="6350">
+                      <a:solidFill>
+                        <a:srgbClr val="BBBBBB"/>
+                      </a:solidFill>
+                    </a:lnL>
+                    <a:lnR w="6350">
+                      <a:solidFill>
+                        <a:srgbClr val="BBBBBB"/>
+                      </a:solidFill>
+                    </a:lnR>
+                    <a:lnT w="6350">
+                      <a:solidFill>
+                        <a:srgbClr val="BBBBBB"/>
+                      </a:solidFill>
+                    </a:lnT>
+                    <a:lnB w="6350">
+                      <a:solidFill>
+                        <a:srgbClr val="BBBBBB"/>
+                      </a:solidFill>
+                    </a:lnB>
+                    <a:solidFill>
+                      <a:srgbClr val="FFF2CC"/>
+                    </a:solidFill>
                   </a:tcPr>
                 </a:tc>
                 <a:tc>
@@ -9222,7 +9219,7 @@
                             <a:srgbClr val="333333"/>
                           </a:solidFill>
                         </a:rPr>
-                        <a:t>2.95</a:t>
+                        <a:t>2.84</a:t>
                       </a:r>
                     </a:p>
                   </a:txBody>
@@ -9261,7 +9258,7 @@
                             <a:srgbClr val="808080"/>
                           </a:solidFill>
                         </a:rPr>
-                        <a:t>미출현, 출현주기,…</a:t>
+                        <a:t>미출현, 3의배수,…</a:t>
                       </a:r>
                     </a:p>
                   </a:txBody>
@@ -9341,7 +9338,7 @@
                             <a:srgbClr val="BF8F00"/>
                           </a:solidFill>
                         </a:rPr>
-                        <a:t>3</a:t>
+                        <a:t>35</a:t>
                       </a:r>
                     </a:p>
                   </a:txBody>
@@ -9383,7 +9380,7 @@
                             <a:srgbClr val="333333"/>
                           </a:solidFill>
                         </a:rPr>
-                        <a:t>2.84</a:t>
+                        <a:t>2.80</a:t>
                       </a:r>
                     </a:p>
                   </a:txBody>
@@ -9422,7 +9419,7 @@
                             <a:srgbClr val="808080"/>
                           </a:solidFill>
                         </a:rPr>
-                        <a:t>미출현, 3의배수,…</a:t>
+                        <a:t>미출현, 출현주기,…</a:t>
                       </a:r>
                     </a:p>
                   </a:txBody>
@@ -9499,37 +9496,34 @@
                       <a:r>
                         <a:rPr lang="ko-KR" sz="900" b="1">
                           <a:solidFill>
-                            <a:srgbClr val="BF8F00"/>
-                          </a:solidFill>
-                        </a:rPr>
-                        <a:t>35</a:t>
-                      </a:r>
-                    </a:p>
-                  </a:txBody>
-                  <a:tcPr anchor="ctr" marL="0" marR="0" marT="0" marB="0">
-                    <a:lnL w="6350">
-                      <a:solidFill>
-                        <a:srgbClr val="BBBBBB"/>
-                      </a:solidFill>
-                    </a:lnL>
-                    <a:lnR w="6350">
-                      <a:solidFill>
-                        <a:srgbClr val="BBBBBB"/>
-                      </a:solidFill>
-                    </a:lnR>
-                    <a:lnT w="6350">
-                      <a:solidFill>
-                        <a:srgbClr val="BBBBBB"/>
-                      </a:solidFill>
-                    </a:lnT>
-                    <a:lnB w="6350">
-                      <a:solidFill>
-                        <a:srgbClr val="BBBBBB"/>
-                      </a:solidFill>
-                    </a:lnB>
-                    <a:solidFill>
-                      <a:srgbClr val="FFF2CC"/>
-                    </a:solidFill>
+                            <a:srgbClr val="1F3864"/>
+                          </a:solidFill>
+                        </a:rPr>
+                        <a:t>33</a:t>
+                      </a:r>
+                    </a:p>
+                  </a:txBody>
+                  <a:tcPr anchor="ctr" marL="0" marR="0" marT="0" marB="0">
+                    <a:lnL w="6350">
+                      <a:solidFill>
+                        <a:srgbClr val="BBBBBB"/>
+                      </a:solidFill>
+                    </a:lnL>
+                    <a:lnR w="6350">
+                      <a:solidFill>
+                        <a:srgbClr val="BBBBBB"/>
+                      </a:solidFill>
+                    </a:lnR>
+                    <a:lnT w="6350">
+                      <a:solidFill>
+                        <a:srgbClr val="BBBBBB"/>
+                      </a:solidFill>
+                    </a:lnT>
+                    <a:lnB w="6350">
+                      <a:solidFill>
+                        <a:srgbClr val="BBBBBB"/>
+                      </a:solidFill>
+                    </a:lnB>
                   </a:tcPr>
                 </a:tc>
                 <a:tc>
@@ -9544,7 +9538,7 @@
                             <a:srgbClr val="333333"/>
                           </a:solidFill>
                         </a:rPr>
-                        <a:t>2.80</a:t>
+                        <a:t>2.79</a:t>
                       </a:r>
                     </a:p>
                   </a:txBody>
@@ -9583,7 +9577,7 @@
                             <a:srgbClr val="808080"/>
                           </a:solidFill>
                         </a:rPr>
-                        <a:t>미출현, 출현주기,…</a:t>
+                        <a:t>3의배수, 합계균형…</a:t>
                       </a:r>
                     </a:p>
                   </a:txBody>
@@ -9660,37 +9654,34 @@
                       <a:r>
                         <a:rPr lang="ko-KR" sz="900" b="1">
                           <a:solidFill>
-                            <a:srgbClr val="BF8F00"/>
-                          </a:solidFill>
-                        </a:rPr>
-                        <a:t>33</a:t>
-                      </a:r>
-                    </a:p>
-                  </a:txBody>
-                  <a:tcPr anchor="ctr" marL="0" marR="0" marT="0" marB="0">
-                    <a:lnL w="6350">
-                      <a:solidFill>
-                        <a:srgbClr val="BBBBBB"/>
-                      </a:solidFill>
-                    </a:lnL>
-                    <a:lnR w="6350">
-                      <a:solidFill>
-                        <a:srgbClr val="BBBBBB"/>
-                      </a:solidFill>
-                    </a:lnR>
-                    <a:lnT w="6350">
-                      <a:solidFill>
-                        <a:srgbClr val="BBBBBB"/>
-                      </a:solidFill>
-                    </a:lnT>
-                    <a:lnB w="6350">
-                      <a:solidFill>
-                        <a:srgbClr val="BBBBBB"/>
-                      </a:solidFill>
-                    </a:lnB>
-                    <a:solidFill>
-                      <a:srgbClr val="FFF2CC"/>
-                    </a:solidFill>
+                            <a:srgbClr val="1F3864"/>
+                          </a:solidFill>
+                        </a:rPr>
+                        <a:t>40</a:t>
+                      </a:r>
+                    </a:p>
+                  </a:txBody>
+                  <a:tcPr anchor="ctr" marL="0" marR="0" marT="0" marB="0">
+                    <a:lnL w="6350">
+                      <a:solidFill>
+                        <a:srgbClr val="BBBBBB"/>
+                      </a:solidFill>
+                    </a:lnL>
+                    <a:lnR w="6350">
+                      <a:solidFill>
+                        <a:srgbClr val="BBBBBB"/>
+                      </a:solidFill>
+                    </a:lnR>
+                    <a:lnT w="6350">
+                      <a:solidFill>
+                        <a:srgbClr val="BBBBBB"/>
+                      </a:solidFill>
+                    </a:lnT>
+                    <a:lnB w="6350">
+                      <a:solidFill>
+                        <a:srgbClr val="BBBBBB"/>
+                      </a:solidFill>
+                    </a:lnB>
                   </a:tcPr>
                 </a:tc>
                 <a:tc>
@@ -9705,7 +9696,7 @@
                             <a:srgbClr val="333333"/>
                           </a:solidFill>
                         </a:rPr>
-                        <a:t>2.79</a:t>
+                        <a:t>2.44</a:t>
                       </a:r>
                     </a:p>
                   </a:txBody>
@@ -9744,7 +9735,7 @@
                             <a:srgbClr val="808080"/>
                           </a:solidFill>
                         </a:rPr>
-                        <a:t>3의배수, 합계균형…</a:t>
+                        <a:t>미출현, 출현주기,…</a:t>
                       </a:r>
                     </a:p>
                   </a:txBody>
@@ -9821,37 +9812,34 @@
                       <a:r>
                         <a:rPr lang="ko-KR" sz="900" b="1">
                           <a:solidFill>
-                            <a:srgbClr val="BF8F00"/>
-                          </a:solidFill>
-                        </a:rPr>
-                        <a:t>9</a:t>
-                      </a:r>
-                    </a:p>
-                  </a:txBody>
-                  <a:tcPr anchor="ctr" marL="0" marR="0" marT="0" marB="0">
-                    <a:lnL w="6350">
-                      <a:solidFill>
-                        <a:srgbClr val="BBBBBB"/>
-                      </a:solidFill>
-                    </a:lnL>
-                    <a:lnR w="6350">
-                      <a:solidFill>
-                        <a:srgbClr val="BBBBBB"/>
-                      </a:solidFill>
-                    </a:lnR>
-                    <a:lnT w="6350">
-                      <a:solidFill>
-                        <a:srgbClr val="BBBBBB"/>
-                      </a:solidFill>
-                    </a:lnT>
-                    <a:lnB w="6350">
-                      <a:solidFill>
-                        <a:srgbClr val="BBBBBB"/>
-                      </a:solidFill>
-                    </a:lnB>
-                    <a:solidFill>
-                      <a:srgbClr val="FFF2CC"/>
-                    </a:solidFill>
+                            <a:srgbClr val="1F3864"/>
+                          </a:solidFill>
+                        </a:rPr>
+                        <a:t>45</a:t>
+                      </a:r>
+                    </a:p>
+                  </a:txBody>
+                  <a:tcPr anchor="ctr" marL="0" marR="0" marT="0" marB="0">
+                    <a:lnL w="6350">
+                      <a:solidFill>
+                        <a:srgbClr val="BBBBBB"/>
+                      </a:solidFill>
+                    </a:lnL>
+                    <a:lnR w="6350">
+                      <a:solidFill>
+                        <a:srgbClr val="BBBBBB"/>
+                      </a:solidFill>
+                    </a:lnR>
+                    <a:lnT w="6350">
+                      <a:solidFill>
+                        <a:srgbClr val="BBBBBB"/>
+                      </a:solidFill>
+                    </a:lnT>
+                    <a:lnB w="6350">
+                      <a:solidFill>
+                        <a:srgbClr val="BBBBBB"/>
+                      </a:solidFill>
+                    </a:lnB>
                   </a:tcPr>
                 </a:tc>
                 <a:tc>
@@ -9866,7 +9854,7 @@
                             <a:srgbClr val="333333"/>
                           </a:solidFill>
                         </a:rPr>
-                        <a:t>2.50</a:t>
+                        <a:t>2.40</a:t>
                       </a:r>
                     </a:p>
                   </a:txBody>
@@ -9905,7 +9893,7 @@
                             <a:srgbClr val="808080"/>
                           </a:solidFill>
                         </a:rPr>
-                        <a:t>3의배수, 합계균형…</a:t>
+                        <a:t>3의배수, 고저균형</a:t>
                       </a:r>
                     </a:p>
                   </a:txBody>
@@ -9985,7 +9973,7 @@
                             <a:srgbClr val="1F3864"/>
                           </a:solidFill>
                         </a:rPr>
-                        <a:t>40</a:t>
+                        <a:t>38</a:t>
                       </a:r>
                     </a:p>
                   </a:txBody>
@@ -10024,7 +10012,7 @@
                             <a:srgbClr val="333333"/>
                           </a:solidFill>
                         </a:rPr>
-                        <a:t>2.44</a:t>
+                        <a:t>2.40</a:t>
                       </a:r>
                     </a:p>
                   </a:txBody>
@@ -10334,34 +10322,37 @@
                       <a:r>
                         <a:rPr lang="ko-KR" sz="900" b="1">
                           <a:solidFill>
-                            <a:srgbClr val="1F3864"/>
-                          </a:solidFill>
-                        </a:rPr>
-                        <a:t>45</a:t>
-                      </a:r>
-                    </a:p>
-                  </a:txBody>
-                  <a:tcPr anchor="ctr" marL="0" marR="0" marT="0" marB="0">
-                    <a:lnL w="6350">
-                      <a:solidFill>
-                        <a:srgbClr val="BBBBBB"/>
-                      </a:solidFill>
-                    </a:lnL>
-                    <a:lnR w="6350">
-                      <a:solidFill>
-                        <a:srgbClr val="BBBBBB"/>
-                      </a:solidFill>
-                    </a:lnR>
-                    <a:lnT w="6350">
-                      <a:solidFill>
-                        <a:srgbClr val="BBBBBB"/>
-                      </a:solidFill>
-                    </a:lnT>
-                    <a:lnB w="6350">
-                      <a:solidFill>
-                        <a:srgbClr val="BBBBBB"/>
-                      </a:solidFill>
-                    </a:lnB>
+                            <a:srgbClr val="BF8F00"/>
+                          </a:solidFill>
+                        </a:rPr>
+                        <a:t>39</a:t>
+                      </a:r>
+                    </a:p>
+                  </a:txBody>
+                  <a:tcPr anchor="ctr" marL="0" marR="0" marT="0" marB="0">
+                    <a:lnL w="6350">
+                      <a:solidFill>
+                        <a:srgbClr val="BBBBBB"/>
+                      </a:solidFill>
+                    </a:lnL>
+                    <a:lnR w="6350">
+                      <a:solidFill>
+                        <a:srgbClr val="BBBBBB"/>
+                      </a:solidFill>
+                    </a:lnR>
+                    <a:lnT w="6350">
+                      <a:solidFill>
+                        <a:srgbClr val="BBBBBB"/>
+                      </a:solidFill>
+                    </a:lnT>
+                    <a:lnB w="6350">
+                      <a:solidFill>
+                        <a:srgbClr val="BBBBBB"/>
+                      </a:solidFill>
+                    </a:lnB>
+                    <a:solidFill>
+                      <a:srgbClr val="FFF2CC"/>
+                    </a:solidFill>
                   </a:tcPr>
                 </a:tc>
                 <a:tc>
@@ -10376,7 +10367,7 @@
                             <a:srgbClr val="333333"/>
                           </a:solidFill>
                         </a:rPr>
-                        <a:t>2.40</a:t>
+                        <a:t>2.39</a:t>
                       </a:r>
                     </a:p>
                   </a:txBody>
@@ -10415,7 +10406,7 @@
                             <a:srgbClr val="808080"/>
                           </a:solidFill>
                         </a:rPr>
-                        <a:t>3의배수, 고저균형</a:t>
+                        <a:t>3의배수, 합계균형…</a:t>
                       </a:r>
                     </a:p>
                   </a:txBody>
@@ -10495,7 +10486,7 @@
                             <a:srgbClr val="BF8F00"/>
                           </a:solidFill>
                         </a:rPr>
-                        <a:t>38</a:t>
+                        <a:t>43</a:t>
                       </a:r>
                     </a:p>
                   </a:txBody>
@@ -10537,7 +10528,7 @@
                             <a:srgbClr val="333333"/>
                           </a:solidFill>
                         </a:rPr>
-                        <a:t>2.40</a:t>
+                        <a:t>2.31</a:t>
                       </a:r>
                     </a:p>
                   </a:txBody>
@@ -10656,7 +10647,7 @@
                             <a:srgbClr val="BF8F00"/>
                           </a:solidFill>
                         </a:rPr>
-                        <a:t>39</a:t>
+                        <a:t>21</a:t>
                       </a:r>
                     </a:p>
                   </a:txBody>
@@ -10698,7 +10689,7 @@
                             <a:srgbClr val="333333"/>
                           </a:solidFill>
                         </a:rPr>
-                        <a:t>2.39</a:t>
+                        <a:t>2.28</a:t>
                       </a:r>
                     </a:p>
                   </a:txBody>
@@ -10737,7 +10728,7 @@
                             <a:srgbClr val="808080"/>
                           </a:solidFill>
                         </a:rPr>
-                        <a:t>3의배수, 합계균형…</a:t>
+                        <a:t>3의배수, 합계균형</a:t>
                       </a:r>
                     </a:p>
                   </a:txBody>
@@ -10817,7 +10808,7 @@
                             <a:srgbClr val="BF8F00"/>
                           </a:solidFill>
                         </a:rPr>
-                        <a:t>43</a:t>
+                        <a:t>42</a:t>
                       </a:r>
                     </a:p>
                   </a:txBody>
@@ -10859,7 +10850,7 @@
                             <a:srgbClr val="333333"/>
                           </a:solidFill>
                         </a:rPr>
-                        <a:t>2.31</a:t>
+                        <a:t>2.24</a:t>
                       </a:r>
                     </a:p>
                   </a:txBody>
@@ -10898,7 +10889,7 @@
                             <a:srgbClr val="808080"/>
                           </a:solidFill>
                         </a:rPr>
-                        <a:t>미출현, 출현주기,…</a:t>
+                        <a:t>3의배수, 고저균형</a:t>
                       </a:r>
                     </a:p>
                   </a:txBody>
@@ -10978,7 +10969,7 @@
                             <a:srgbClr val="BF8F00"/>
                           </a:solidFill>
                         </a:rPr>
-                        <a:t>21</a:t>
+                        <a:t>18</a:t>
                       </a:r>
                     </a:p>
                   </a:txBody>
@@ -11020,7 +11011,7 @@
                             <a:srgbClr val="333333"/>
                           </a:solidFill>
                         </a:rPr>
-                        <a:t>2.28</a:t>
+                        <a:t>2.19</a:t>
                       </a:r>
                     </a:p>
                   </a:txBody>
@@ -11139,7 +11130,7 @@
                             <a:srgbClr val="1F3864"/>
                           </a:solidFill>
                         </a:rPr>
-                        <a:t>42</a:t>
+                        <a:t>14</a:t>
                       </a:r>
                     </a:p>
                   </a:txBody>
@@ -11178,7 +11169,7 @@
                             <a:srgbClr val="333333"/>
                           </a:solidFill>
                         </a:rPr>
-                        <a:t>2.24</a:t>
+                        <a:t>2.16</a:t>
                       </a:r>
                     </a:p>
                   </a:txBody>
@@ -11217,7 +11208,7 @@
                             <a:srgbClr val="808080"/>
                           </a:solidFill>
                         </a:rPr>
-                        <a:t>3의배수, 고저균형</a:t>
+                        <a:t>미출현, 출현주기,…</a:t>
                       </a:r>
                     </a:p>
                   </a:txBody>
@@ -11297,7 +11288,7 @@
                             <a:srgbClr val="1F3864"/>
                           </a:solidFill>
                         </a:rPr>
-                        <a:t>14</a:t>
+                        <a:t>12</a:t>
                       </a:r>
                     </a:p>
                   </a:txBody>
@@ -11336,7 +11327,7 @@
                             <a:srgbClr val="333333"/>
                           </a:solidFill>
                         </a:rPr>
-                        <a:t>2.16</a:t>
+                        <a:t>1.92</a:t>
                       </a:r>
                     </a:p>
                   </a:txBody>
@@ -11375,7 +11366,7 @@
                             <a:srgbClr val="808080"/>
                           </a:solidFill>
                         </a:rPr>
-                        <a:t>미출현, 출현주기,…</a:t>
+                        <a:t>3의배수, 출현주기…</a:t>
                       </a:r>
                     </a:p>
                   </a:txBody>
@@ -11455,7 +11446,7 @@
                             <a:srgbClr val="1F3864"/>
                           </a:solidFill>
                         </a:rPr>
-                        <a:t>12</a:t>
+                        <a:t>10</a:t>
                       </a:r>
                     </a:p>
                   </a:txBody>
@@ -11494,7 +11485,7 @@
                             <a:srgbClr val="333333"/>
                           </a:solidFill>
                         </a:rPr>
-                        <a:t>1.92</a:t>
+                        <a:t>1.84</a:t>
                       </a:r>
                     </a:p>
                   </a:txBody>
@@ -11533,7 +11524,7 @@
                             <a:srgbClr val="808080"/>
                           </a:solidFill>
                         </a:rPr>
-                        <a:t>3의배수, 출현주기…</a:t>
+                        <a:t>미출현, 출현주기,…</a:t>
                       </a:r>
                     </a:p>
                   </a:txBody>
@@ -11610,34 +11601,37 @@
                       <a:r>
                         <a:rPr lang="ko-KR" sz="900" b="1">
                           <a:solidFill>
-                            <a:srgbClr val="1F3864"/>
-                          </a:solidFill>
-                        </a:rPr>
-                        <a:t>10</a:t>
-                      </a:r>
-                    </a:p>
-                  </a:txBody>
-                  <a:tcPr anchor="ctr" marL="0" marR="0" marT="0" marB="0">
-                    <a:lnL w="6350">
-                      <a:solidFill>
-                        <a:srgbClr val="BBBBBB"/>
-                      </a:solidFill>
-                    </a:lnL>
-                    <a:lnR w="6350">
-                      <a:solidFill>
-                        <a:srgbClr val="BBBBBB"/>
-                      </a:solidFill>
-                    </a:lnR>
-                    <a:lnT w="6350">
-                      <a:solidFill>
-                        <a:srgbClr val="BBBBBB"/>
-                      </a:solidFill>
-                    </a:lnT>
-                    <a:lnB w="6350">
-                      <a:solidFill>
-                        <a:srgbClr val="BBBBBB"/>
-                      </a:solidFill>
-                    </a:lnB>
+                            <a:srgbClr val="BF8F00"/>
+                          </a:solidFill>
+                        </a:rPr>
+                        <a:t>25</a:t>
+                      </a:r>
+                    </a:p>
+                  </a:txBody>
+                  <a:tcPr anchor="ctr" marL="0" marR="0" marT="0" marB="0">
+                    <a:lnL w="6350">
+                      <a:solidFill>
+                        <a:srgbClr val="BBBBBB"/>
+                      </a:solidFill>
+                    </a:lnL>
+                    <a:lnR w="6350">
+                      <a:solidFill>
+                        <a:srgbClr val="BBBBBB"/>
+                      </a:solidFill>
+                    </a:lnR>
+                    <a:lnT w="6350">
+                      <a:solidFill>
+                        <a:srgbClr val="BBBBBB"/>
+                      </a:solidFill>
+                    </a:lnT>
+                    <a:lnB w="6350">
+                      <a:solidFill>
+                        <a:srgbClr val="BBBBBB"/>
+                      </a:solidFill>
+                    </a:lnB>
+                    <a:solidFill>
+                      <a:srgbClr val="FFF2CC"/>
+                    </a:solidFill>
                   </a:tcPr>
                 </a:tc>
                 <a:tc>
@@ -11691,7 +11685,7 @@
                             <a:srgbClr val="808080"/>
                           </a:solidFill>
                         </a:rPr>
-                        <a:t>미출현, 출현주기,…</a:t>
+                        <a:t>합계균형, 고저균형</a:t>
                       </a:r>
                     </a:p>
                   </a:txBody>
@@ -11771,7 +11765,7 @@
                             <a:srgbClr val="1F3864"/>
                           </a:solidFill>
                         </a:rPr>
-                        <a:t>25</a:t>
+                        <a:t>26</a:t>
                       </a:r>
                     </a:p>
                   </a:txBody>
@@ -11810,7 +11804,7 @@
                             <a:srgbClr val="333333"/>
                           </a:solidFill>
                         </a:rPr>
-                        <a:t>1.84</a:t>
+                        <a:t>1.78</a:t>
                       </a:r>
                     </a:p>
                   </a:txBody>
@@ -11926,34 +11920,37 @@
                       <a:r>
                         <a:rPr lang="ko-KR" sz="900" b="1">
                           <a:solidFill>
-                            <a:srgbClr val="1F3864"/>
-                          </a:solidFill>
-                        </a:rPr>
-                        <a:t>26</a:t>
-                      </a:r>
-                    </a:p>
-                  </a:txBody>
-                  <a:tcPr anchor="ctr" marL="0" marR="0" marT="0" marB="0">
-                    <a:lnL w="6350">
-                      <a:solidFill>
-                        <a:srgbClr val="BBBBBB"/>
-                      </a:solidFill>
-                    </a:lnL>
-                    <a:lnR w="6350">
-                      <a:solidFill>
-                        <a:srgbClr val="BBBBBB"/>
-                      </a:solidFill>
-                    </a:lnR>
-                    <a:lnT w="6350">
-                      <a:solidFill>
-                        <a:srgbClr val="BBBBBB"/>
-                      </a:solidFill>
-                    </a:lnT>
-                    <a:lnB w="6350">
-                      <a:solidFill>
-                        <a:srgbClr val="BBBBBB"/>
-                      </a:solidFill>
-                    </a:lnB>
+                            <a:srgbClr val="BF8F00"/>
+                          </a:solidFill>
+                        </a:rPr>
+                        <a:t>28</a:t>
+                      </a:r>
+                    </a:p>
+                  </a:txBody>
+                  <a:tcPr anchor="ctr" marL="0" marR="0" marT="0" marB="0">
+                    <a:lnL w="6350">
+                      <a:solidFill>
+                        <a:srgbClr val="BBBBBB"/>
+                      </a:solidFill>
+                    </a:lnL>
+                    <a:lnR w="6350">
+                      <a:solidFill>
+                        <a:srgbClr val="BBBBBB"/>
+                      </a:solidFill>
+                    </a:lnR>
+                    <a:lnT w="6350">
+                      <a:solidFill>
+                        <a:srgbClr val="BBBBBB"/>
+                      </a:solidFill>
+                    </a:lnT>
+                    <a:lnB w="6350">
+                      <a:solidFill>
+                        <a:srgbClr val="BBBBBB"/>
+                      </a:solidFill>
+                    </a:lnB>
+                    <a:solidFill>
+                      <a:srgbClr val="FFF2CC"/>
+                    </a:solidFill>
                   </a:tcPr>
                 </a:tc>
                 <a:tc>
@@ -11968,7 +11965,7 @@
                             <a:srgbClr val="333333"/>
                           </a:solidFill>
                         </a:rPr>
-                        <a:t>1.78</a:t>
+                        <a:t>1.67</a:t>
                       </a:r>
                     </a:p>
                   </a:txBody>
@@ -12087,7 +12084,7 @@
                             <a:srgbClr val="1F3864"/>
                           </a:solidFill>
                         </a:rPr>
-                        <a:t>28</a:t>
+                        <a:t>19</a:t>
                       </a:r>
                     </a:p>
                   </a:txBody>
@@ -12126,7 +12123,7 @@
                             <a:srgbClr val="333333"/>
                           </a:solidFill>
                         </a:rPr>
-                        <a:t>1.67</a:t>
+                        <a:t>1.54</a:t>
                       </a:r>
                     </a:p>
                   </a:txBody>
@@ -12165,7 +12162,7 @@
                             <a:srgbClr val="808080"/>
                           </a:solidFill>
                         </a:rPr>
-                        <a:t>합계균형, 고저균형</a:t>
+                        <a:t>합계균형, 커스텀패턴</a:t>
                       </a:r>
                     </a:p>
                   </a:txBody>
@@ -12245,7 +12242,7 @@
                             <a:srgbClr val="1F3864"/>
                           </a:solidFill>
                         </a:rPr>
-                        <a:t>13</a:t>
+                        <a:t>1</a:t>
                       </a:r>
                     </a:p>
                   </a:txBody>
@@ -12284,7 +12281,7 @@
                             <a:srgbClr val="333333"/>
                           </a:solidFill>
                         </a:rPr>
-                        <a:t>1.64</a:t>
+                        <a:t>1.50</a:t>
                       </a:r>
                     </a:p>
                   </a:txBody>
@@ -12323,7 +12320,7 @@
                             <a:srgbClr val="808080"/>
                           </a:solidFill>
                         </a:rPr>
-                        <a:t>합계균형, 커스텀패턴</a:t>
+                        <a:t>미출현, 출현주기</a:t>
                       </a:r>
                     </a:p>
                   </a:txBody>
@@ -12403,7 +12400,7 @@
                             <a:srgbClr val="1F3864"/>
                           </a:solidFill>
                         </a:rPr>
-                        <a:t>1</a:t>
+                        <a:t>32</a:t>
                       </a:r>
                     </a:p>
                   </a:txBody>
@@ -12442,7 +12439,7 @@
                             <a:srgbClr val="333333"/>
                           </a:solidFill>
                         </a:rPr>
-                        <a:t>1.50</a:t>
+                        <a:t>1.45</a:t>
                       </a:r>
                     </a:p>
                   </a:txBody>
@@ -12481,7 +12478,7 @@
                             <a:srgbClr val="808080"/>
                           </a:solidFill>
                         </a:rPr>
-                        <a:t>미출현, 출현주기</a:t>
+                        <a:t>합계균형, 고저균형</a:t>
                       </a:r>
                     </a:p>
                   </a:txBody>
@@ -12561,7 +12558,7 @@
                             <a:srgbClr val="1F3864"/>
                           </a:solidFill>
                         </a:rPr>
-                        <a:t>32</a:t>
+                        <a:t>6</a:t>
                       </a:r>
                     </a:p>
                   </a:txBody>
@@ -12600,7 +12597,7 @@
                             <a:srgbClr val="333333"/>
                           </a:solidFill>
                         </a:rPr>
-                        <a:t>1.45</a:t>
+                        <a:t>1.43</a:t>
                       </a:r>
                     </a:p>
                   </a:txBody>
@@ -12639,7 +12636,7 @@
                             <a:srgbClr val="808080"/>
                           </a:solidFill>
                         </a:rPr>
-                        <a:t>합계균형, 고저균형</a:t>
+                        <a:t>3의배수, 합계균형</a:t>
                       </a:r>
                     </a:p>
                   </a:txBody>
@@ -12913,7 +12910,7 @@
                             <a:srgbClr val="1F3864"/>
                           </a:solidFill>
                         </a:rPr>
-                        <a:t>6</a:t>
+                        <a:t>5</a:t>
                       </a:r>
                     </a:p>
                   </a:txBody>
@@ -12991,7 +12988,7 @@
                             <a:srgbClr val="808080"/>
                           </a:solidFill>
                         </a:rPr>
-                        <a:t>3의배수, 합계균형</a:t>
+                        <a:t>미출현, 출현주기,…</a:t>
                       </a:r>
                     </a:p>
                   </a:txBody>
@@ -13071,7 +13068,7 @@
                             <a:srgbClr val="1F3864"/>
                           </a:solidFill>
                         </a:rPr>
-                        <a:t>5</a:t>
+                        <a:t>9</a:t>
                       </a:r>
                     </a:p>
                   </a:txBody>
@@ -13110,7 +13107,7 @@
                             <a:srgbClr val="333333"/>
                           </a:solidFill>
                         </a:rPr>
-                        <a:t>1.43</a:t>
+                        <a:t>1.36</a:t>
                       </a:r>
                     </a:p>
                   </a:txBody>
@@ -13149,7 +13146,7 @@
                             <a:srgbClr val="808080"/>
                           </a:solidFill>
                         </a:rPr>
-                        <a:t>미출현, 출현주기,…</a:t>
+                        <a:t>3의배수, 합계균형</a:t>
                       </a:r>
                     </a:p>
                   </a:txBody>
@@ -13226,7 +13223,7 @@
                       <a:r>
                         <a:rPr lang="ko-KR" sz="900" b="1">
                           <a:solidFill>
-                            <a:srgbClr val="BF8F00"/>
+                            <a:srgbClr val="1F3864"/>
                           </a:solidFill>
                         </a:rPr>
                         <a:t>2</a:t>
@@ -13254,9 +13251,6 @@
                         <a:srgbClr val="BBBBBB"/>
                       </a:solidFill>
                     </a:lnB>
-                    <a:solidFill>
-                      <a:srgbClr val="FFF2CC"/>
-                    </a:solidFill>
                   </a:tcPr>
                 </a:tc>
                 <a:tc>
@@ -13387,7 +13381,7 @@
                       <a:r>
                         <a:rPr lang="ko-KR" sz="900" b="1">
                           <a:solidFill>
-                            <a:srgbClr val="BF8F00"/>
+                            <a:srgbClr val="1F3864"/>
                           </a:solidFill>
                         </a:rPr>
                         <a:t>37</a:t>
@@ -13415,9 +13409,6 @@
                         <a:srgbClr val="BBBBBB"/>
                       </a:solidFill>
                     </a:lnB>
-                    <a:solidFill>
-                      <a:srgbClr val="FFF2CC"/>
-                    </a:solidFill>
                   </a:tcPr>
                 </a:tc>
                 <a:tc>
@@ -14183,7 +14174,7 @@
                             <a:srgbClr val="1F3864"/>
                           </a:solidFill>
                         </a:rPr>
-                        <a:t>19</a:t>
+                        <a:t>17</a:t>
                       </a:r>
                     </a:p>
                   </a:txBody>
@@ -14222,7 +14213,7 @@
                             <a:srgbClr val="333333"/>
                           </a:solidFill>
                         </a:rPr>
-                        <a:t>0.84</a:t>
+                        <a:t>0.73</a:t>
                       </a:r>
                     </a:p>
                   </a:txBody>
@@ -14341,7 +14332,7 @@
                             <a:srgbClr val="1F3864"/>
                           </a:solidFill>
                         </a:rPr>
-                        <a:t>17</a:t>
+                        <a:t>16</a:t>
                       </a:r>
                     </a:p>
                   </a:txBody>
@@ -14380,7 +14371,7 @@
                             <a:srgbClr val="333333"/>
                           </a:solidFill>
                         </a:rPr>
-                        <a:t>0.73</a:t>
+                        <a:t>0.67</a:t>
                       </a:r>
                     </a:p>
                   </a:txBody>
@@ -14499,7 +14490,7 @@
                             <a:srgbClr val="1F3864"/>
                           </a:solidFill>
                         </a:rPr>
-                        <a:t>16</a:t>
+                        <a:t>13</a:t>
                       </a:r>
                     </a:p>
                   </a:txBody>
@@ -14538,7 +14529,7 @@
                             <a:srgbClr val="333333"/>
                           </a:solidFill>
                         </a:rPr>
-                        <a:t>0.67</a:t>
+                        <a:t>0.50</a:t>
                       </a:r>
                     </a:p>
                   </a:txBody>
@@ -15424,9 +15415,9 @@
                     <a:p>
                       <a:pPr algn="ctr"/>
                       <a:r>
-                        <a:rPr lang="ko-KR" sz="1100" b="1">
-                          <a:solidFill>
-                            <a:srgbClr val="FFFFFF"/>
+                        <a:rPr lang="ko-KR" sz="1100" b="0">
+                          <a:solidFill>
+                            <a:srgbClr val="333333"/>
                           </a:solidFill>
                         </a:rPr>
                         <a:t>2</a:t>
@@ -15455,7 +15446,7 @@
                       </a:solidFill>
                     </a:lnB>
                     <a:solidFill>
-                      <a:srgbClr val="C00000"/>
+                      <a:srgbClr val="FFFFFF"/>
                     </a:solidFill>
                   </a:tcPr>
                 </a:tc>
@@ -15974,12 +15965,138 @@
                     <a:p>
                       <a:pPr algn="ctr"/>
                       <a:r>
+                        <a:rPr lang="ko-KR" sz="1100" b="0">
+                          <a:solidFill>
+                            <a:srgbClr val="333333"/>
+                          </a:solidFill>
+                        </a:rPr>
+                        <a:t>15</a:t>
+                      </a:r>
+                    </a:p>
+                  </a:txBody>
+                  <a:tcPr anchor="ctr" marL="0" marR="0" marT="0" marB="0">
+                    <a:lnL w="6350">
+                      <a:solidFill>
+                        <a:srgbClr val="BBBBBB"/>
+                      </a:solidFill>
+                    </a:lnL>
+                    <a:lnR w="6350">
+                      <a:solidFill>
+                        <a:srgbClr val="BBBBBB"/>
+                      </a:solidFill>
+                    </a:lnR>
+                    <a:lnT w="6350">
+                      <a:solidFill>
+                        <a:srgbClr val="BBBBBB"/>
+                      </a:solidFill>
+                    </a:lnT>
+                    <a:lnB w="6350">
+                      <a:solidFill>
+                        <a:srgbClr val="BBBBBB"/>
+                      </a:solidFill>
+                    </a:lnB>
+                    <a:solidFill>
+                      <a:srgbClr val="FFFFFF"/>
+                    </a:solidFill>
+                  </a:tcPr>
+                </a:tc>
+                <a:tc>
+                  <a:txBody>
+                    <a:bodyPr lIns="9525" rIns="9525" tIns="6350" bIns="6350" anchor="ctr"/>
+                    <a:lstStyle/>
+                    <a:p>
+                      <a:pPr algn="ctr"/>
+                      <a:r>
+                        <a:rPr lang="ko-KR" sz="1100" b="0">
+                          <a:solidFill>
+                            <a:srgbClr val="333333"/>
+                          </a:solidFill>
+                        </a:rPr>
+                        <a:t>16</a:t>
+                      </a:r>
+                    </a:p>
+                  </a:txBody>
+                  <a:tcPr anchor="ctr" marL="0" marR="0" marT="0" marB="0">
+                    <a:lnL w="6350">
+                      <a:solidFill>
+                        <a:srgbClr val="BBBBBB"/>
+                      </a:solidFill>
+                    </a:lnL>
+                    <a:lnR w="6350">
+                      <a:solidFill>
+                        <a:srgbClr val="BBBBBB"/>
+                      </a:solidFill>
+                    </a:lnR>
+                    <a:lnT w="6350">
+                      <a:solidFill>
+                        <a:srgbClr val="BBBBBB"/>
+                      </a:solidFill>
+                    </a:lnT>
+                    <a:lnB w="6350">
+                      <a:solidFill>
+                        <a:srgbClr val="BBBBBB"/>
+                      </a:solidFill>
+                    </a:lnB>
+                    <a:solidFill>
+                      <a:srgbClr val="FFFFFF"/>
+                    </a:solidFill>
+                  </a:tcPr>
+                </a:tc>
+                <a:tc>
+                  <a:txBody>
+                    <a:bodyPr lIns="9525" rIns="9525" tIns="6350" bIns="6350" anchor="ctr"/>
+                    <a:lstStyle/>
+                    <a:p>
+                      <a:pPr algn="ctr"/>
+                      <a:r>
+                        <a:rPr lang="ko-KR" sz="1100" b="0">
+                          <a:solidFill>
+                            <a:srgbClr val="333333"/>
+                          </a:solidFill>
+                        </a:rPr>
+                        <a:t>17</a:t>
+                      </a:r>
+                    </a:p>
+                  </a:txBody>
+                  <a:tcPr anchor="ctr" marL="0" marR="0" marT="0" marB="0">
+                    <a:lnL w="6350">
+                      <a:solidFill>
+                        <a:srgbClr val="BBBBBB"/>
+                      </a:solidFill>
+                    </a:lnL>
+                    <a:lnR w="6350">
+                      <a:solidFill>
+                        <a:srgbClr val="BBBBBB"/>
+                      </a:solidFill>
+                    </a:lnR>
+                    <a:lnT w="6350">
+                      <a:solidFill>
+                        <a:srgbClr val="BBBBBB"/>
+                      </a:solidFill>
+                    </a:lnT>
+                    <a:lnB w="6350">
+                      <a:solidFill>
+                        <a:srgbClr val="BBBBBB"/>
+                      </a:solidFill>
+                    </a:lnB>
+                    <a:solidFill>
+                      <a:srgbClr val="FFFFFF"/>
+                    </a:solidFill>
+                  </a:tcPr>
+                </a:tc>
+                <a:tc>
+                  <a:txBody>
+                    <a:bodyPr lIns="9525" rIns="9525" tIns="6350" bIns="6350" anchor="ctr"/>
+                    <a:lstStyle/>
+                    <a:p>
+                      <a:pPr algn="ctr"/>
+                      <a:r>
                         <a:rPr lang="ko-KR" sz="1100" b="1">
                           <a:solidFill>
                             <a:srgbClr val="FFFFFF"/>
                           </a:solidFill>
                         </a:rPr>
-                        <a:t>15</a:t>
+                        <a:t>18</a:t>
                       </a:r>
                     </a:p>
                   </a:txBody>
@@ -16006,132 +16123,6 @@
                     </a:lnB>
                     <a:solidFill>
                       <a:srgbClr val="C00000"/>
-                    </a:solidFill>
-                  </a:tcPr>
-                </a:tc>
-                <a:tc>
-                  <a:txBody>
-                    <a:bodyPr lIns="9525" rIns="9525" tIns="6350" bIns="6350" anchor="ctr"/>
-                    <a:lstStyle/>
-                    <a:p>
-                      <a:pPr algn="ctr"/>
-                      <a:r>
-                        <a:rPr lang="ko-KR" sz="1100" b="0">
-                          <a:solidFill>
-                            <a:srgbClr val="333333"/>
-                          </a:solidFill>
-                        </a:rPr>
-                        <a:t>16</a:t>
-                      </a:r>
-                    </a:p>
-                  </a:txBody>
-                  <a:tcPr anchor="ctr" marL="0" marR="0" marT="0" marB="0">
-                    <a:lnL w="6350">
-                      <a:solidFill>
-                        <a:srgbClr val="BBBBBB"/>
-                      </a:solidFill>
-                    </a:lnL>
-                    <a:lnR w="6350">
-                      <a:solidFill>
-                        <a:srgbClr val="BBBBBB"/>
-                      </a:solidFill>
-                    </a:lnR>
-                    <a:lnT w="6350">
-                      <a:solidFill>
-                        <a:srgbClr val="BBBBBB"/>
-                      </a:solidFill>
-                    </a:lnT>
-                    <a:lnB w="6350">
-                      <a:solidFill>
-                        <a:srgbClr val="BBBBBB"/>
-                      </a:solidFill>
-                    </a:lnB>
-                    <a:solidFill>
-                      <a:srgbClr val="FFFFFF"/>
-                    </a:solidFill>
-                  </a:tcPr>
-                </a:tc>
-                <a:tc>
-                  <a:txBody>
-                    <a:bodyPr lIns="9525" rIns="9525" tIns="6350" bIns="6350" anchor="ctr"/>
-                    <a:lstStyle/>
-                    <a:p>
-                      <a:pPr algn="ctr"/>
-                      <a:r>
-                        <a:rPr lang="ko-KR" sz="1100" b="0">
-                          <a:solidFill>
-                            <a:srgbClr val="333333"/>
-                          </a:solidFill>
-                        </a:rPr>
-                        <a:t>17</a:t>
-                      </a:r>
-                    </a:p>
-                  </a:txBody>
-                  <a:tcPr anchor="ctr" marL="0" marR="0" marT="0" marB="0">
-                    <a:lnL w="6350">
-                      <a:solidFill>
-                        <a:srgbClr val="BBBBBB"/>
-                      </a:solidFill>
-                    </a:lnL>
-                    <a:lnR w="6350">
-                      <a:solidFill>
-                        <a:srgbClr val="BBBBBB"/>
-                      </a:solidFill>
-                    </a:lnR>
-                    <a:lnT w="6350">
-                      <a:solidFill>
-                        <a:srgbClr val="BBBBBB"/>
-                      </a:solidFill>
-                    </a:lnT>
-                    <a:lnB w="6350">
-                      <a:solidFill>
-                        <a:srgbClr val="BBBBBB"/>
-                      </a:solidFill>
-                    </a:lnB>
-                    <a:solidFill>
-                      <a:srgbClr val="FFFFFF"/>
-                    </a:solidFill>
-                  </a:tcPr>
-                </a:tc>
-                <a:tc>
-                  <a:txBody>
-                    <a:bodyPr lIns="9525" rIns="9525" tIns="6350" bIns="6350" anchor="ctr"/>
-                    <a:lstStyle/>
-                    <a:p>
-                      <a:pPr algn="ctr"/>
-                      <a:r>
-                        <a:rPr lang="ko-KR" sz="1100" b="0">
-                          <a:solidFill>
-                            <a:srgbClr val="333333"/>
-                          </a:solidFill>
-                        </a:rPr>
-                        <a:t>18</a:t>
-                      </a:r>
-                    </a:p>
-                  </a:txBody>
-                  <a:tcPr anchor="ctr" marL="0" marR="0" marT="0" marB="0">
-                    <a:lnL w="6350">
-                      <a:solidFill>
-                        <a:srgbClr val="BBBBBB"/>
-                      </a:solidFill>
-                    </a:lnL>
-                    <a:lnR w="6350">
-                      <a:solidFill>
-                        <a:srgbClr val="BBBBBB"/>
-                      </a:solidFill>
-                    </a:lnR>
-                    <a:lnT w="6350">
-                      <a:solidFill>
-                        <a:srgbClr val="BBBBBB"/>
-                      </a:solidFill>
-                    </a:lnT>
-                    <a:lnB w="6350">
-                      <a:solidFill>
-                        <a:srgbClr val="BBBBBB"/>
-                      </a:solidFill>
-                    </a:lnB>
-                    <a:solidFill>
-                      <a:srgbClr val="FFFFFF"/>
                     </a:solidFill>
                   </a:tcPr>
                 </a:tc>
@@ -16312,9 +16303,9 @@
                     <a:p>
                       <a:pPr algn="ctr"/>
                       <a:r>
-                        <a:rPr lang="ko-KR" sz="1100" b="0">
-                          <a:solidFill>
-                            <a:srgbClr val="333333"/>
+                        <a:rPr lang="ko-KR" sz="1100" b="1">
+                          <a:solidFill>
+                            <a:srgbClr val="FFFFFF"/>
                           </a:solidFill>
                         </a:rPr>
                         <a:t>23</a:t>
@@ -16343,7 +16334,7 @@
                       </a:solidFill>
                     </a:lnB>
                     <a:solidFill>
-                      <a:srgbClr val="FFFFFF"/>
+                      <a:srgbClr val="C00000"/>
                     </a:solidFill>
                   </a:tcPr>
                 </a:tc>
@@ -16608,12 +16599,54 @@
                     <a:p>
                       <a:pPr algn="ctr"/>
                       <a:r>
+                        <a:rPr lang="ko-KR" sz="1100" b="0">
+                          <a:solidFill>
+                            <a:srgbClr val="333333"/>
+                          </a:solidFill>
+                        </a:rPr>
+                        <a:t>30</a:t>
+                      </a:r>
+                    </a:p>
+                  </a:txBody>
+                  <a:tcPr anchor="ctr" marL="0" marR="0" marT="0" marB="0">
+                    <a:lnL w="6350">
+                      <a:solidFill>
+                        <a:srgbClr val="BBBBBB"/>
+                      </a:solidFill>
+                    </a:lnL>
+                    <a:lnR w="6350">
+                      <a:solidFill>
+                        <a:srgbClr val="BBBBBB"/>
+                      </a:solidFill>
+                    </a:lnR>
+                    <a:lnT w="6350">
+                      <a:solidFill>
+                        <a:srgbClr val="BBBBBB"/>
+                      </a:solidFill>
+                    </a:lnT>
+                    <a:lnB w="6350">
+                      <a:solidFill>
+                        <a:srgbClr val="BBBBBB"/>
+                      </a:solidFill>
+                    </a:lnB>
+                    <a:solidFill>
+                      <a:srgbClr val="FFFFFF"/>
+                    </a:solidFill>
+                  </a:tcPr>
+                </a:tc>
+                <a:tc>
+                  <a:txBody>
+                    <a:bodyPr lIns="9525" rIns="9525" tIns="6350" bIns="6350" anchor="ctr"/>
+                    <a:lstStyle/>
+                    <a:p>
+                      <a:pPr algn="ctr"/>
+                      <a:r>
                         <a:rPr lang="ko-KR" sz="1100" b="1">
                           <a:solidFill>
                             <a:srgbClr val="FFFFFF"/>
                           </a:solidFill>
                         </a:rPr>
-                        <a:t>30</a:t>
+                        <a:t>31</a:t>
                       </a:r>
                     </a:p>
                   </a:txBody>
@@ -16640,48 +16673,6 @@
                     </a:lnB>
                     <a:solidFill>
                       <a:srgbClr val="C00000"/>
-                    </a:solidFill>
-                  </a:tcPr>
-                </a:tc>
-                <a:tc>
-                  <a:txBody>
-                    <a:bodyPr lIns="9525" rIns="9525" tIns="6350" bIns="6350" anchor="ctr"/>
-                    <a:lstStyle/>
-                    <a:p>
-                      <a:pPr algn="ctr"/>
-                      <a:r>
-                        <a:rPr lang="ko-KR" sz="1100" b="0">
-                          <a:solidFill>
-                            <a:srgbClr val="333333"/>
-                          </a:solidFill>
-                        </a:rPr>
-                        <a:t>31</a:t>
-                      </a:r>
-                    </a:p>
-                  </a:txBody>
-                  <a:tcPr anchor="ctr" marL="0" marR="0" marT="0" marB="0">
-                    <a:lnL w="6350">
-                      <a:solidFill>
-                        <a:srgbClr val="BBBBBB"/>
-                      </a:solidFill>
-                    </a:lnL>
-                    <a:lnR w="6350">
-                      <a:solidFill>
-                        <a:srgbClr val="BBBBBB"/>
-                      </a:solidFill>
-                    </a:lnR>
-                    <a:lnT w="6350">
-                      <a:solidFill>
-                        <a:srgbClr val="BBBBBB"/>
-                      </a:solidFill>
-                    </a:lnT>
-                    <a:lnB w="6350">
-                      <a:solidFill>
-                        <a:srgbClr val="BBBBBB"/>
-                      </a:solidFill>
-                    </a:lnB>
-                    <a:solidFill>
-                      <a:srgbClr val="FFFFFF"/>
                     </a:solidFill>
                   </a:tcPr>
                 </a:tc>
@@ -16862,12 +16853,54 @@
                     <a:p>
                       <a:pPr algn="ctr"/>
                       <a:r>
+                        <a:rPr lang="ko-KR" sz="1100" b="1">
+                          <a:solidFill>
+                            <a:srgbClr val="FFFFFF"/>
+                          </a:solidFill>
+                        </a:rPr>
+                        <a:t>36</a:t>
+                      </a:r>
+                    </a:p>
+                  </a:txBody>
+                  <a:tcPr anchor="ctr" marL="0" marR="0" marT="0" marB="0">
+                    <a:lnL w="6350">
+                      <a:solidFill>
+                        <a:srgbClr val="BBBBBB"/>
+                      </a:solidFill>
+                    </a:lnL>
+                    <a:lnR w="6350">
+                      <a:solidFill>
+                        <a:srgbClr val="BBBBBB"/>
+                      </a:solidFill>
+                    </a:lnR>
+                    <a:lnT w="6350">
+                      <a:solidFill>
+                        <a:srgbClr val="BBBBBB"/>
+                      </a:solidFill>
+                    </a:lnT>
+                    <a:lnB w="6350">
+                      <a:solidFill>
+                        <a:srgbClr val="BBBBBB"/>
+                      </a:solidFill>
+                    </a:lnB>
+                    <a:solidFill>
+                      <a:srgbClr val="C00000"/>
+                    </a:solidFill>
+                  </a:tcPr>
+                </a:tc>
+                <a:tc>
+                  <a:txBody>
+                    <a:bodyPr lIns="9525" rIns="9525" tIns="6350" bIns="6350" anchor="ctr"/>
+                    <a:lstStyle/>
+                    <a:p>
+                      <a:pPr algn="ctr"/>
+                      <a:r>
                         <a:rPr lang="ko-KR" sz="1100" b="0">
                           <a:solidFill>
                             <a:srgbClr val="333333"/>
                           </a:solidFill>
                         </a:rPr>
-                        <a:t>36</a:t>
+                        <a:t>37</a:t>
                       </a:r>
                     </a:p>
                   </a:txBody>
@@ -16909,7 +16942,7 @@
                             <a:srgbClr val="333333"/>
                           </a:solidFill>
                         </a:rPr>
-                        <a:t>37</a:t>
+                        <a:t>38</a:t>
                       </a:r>
                     </a:p>
                   </a:txBody>
@@ -16951,7 +16984,7 @@
                             <a:srgbClr val="333333"/>
                           </a:solidFill>
                         </a:rPr>
-                        <a:t>38</a:t>
+                        <a:t>39</a:t>
                       </a:r>
                     </a:p>
                   </a:txBody>
@@ -16988,12 +17021,96 @@
                     <a:p>
                       <a:pPr algn="ctr"/>
                       <a:r>
+                        <a:rPr lang="ko-KR" sz="1100" b="0">
+                          <a:solidFill>
+                            <a:srgbClr val="333333"/>
+                          </a:solidFill>
+                        </a:rPr>
+                        <a:t>40</a:t>
+                      </a:r>
+                    </a:p>
+                  </a:txBody>
+                  <a:tcPr anchor="ctr" marL="0" marR="0" marT="0" marB="0">
+                    <a:lnL w="6350">
+                      <a:solidFill>
+                        <a:srgbClr val="BBBBBB"/>
+                      </a:solidFill>
+                    </a:lnL>
+                    <a:lnR w="6350">
+                      <a:solidFill>
+                        <a:srgbClr val="BBBBBB"/>
+                      </a:solidFill>
+                    </a:lnR>
+                    <a:lnT w="6350">
+                      <a:solidFill>
+                        <a:srgbClr val="BBBBBB"/>
+                      </a:solidFill>
+                    </a:lnT>
+                    <a:lnB w="6350">
+                      <a:solidFill>
+                        <a:srgbClr val="BBBBBB"/>
+                      </a:solidFill>
+                    </a:lnB>
+                    <a:solidFill>
+                      <a:srgbClr val="FFFFFF"/>
+                    </a:solidFill>
+                  </a:tcPr>
+                </a:tc>
+                <a:tc>
+                  <a:txBody>
+                    <a:bodyPr lIns="9525" rIns="9525" tIns="6350" bIns="6350" anchor="ctr"/>
+                    <a:lstStyle/>
+                    <a:p>
+                      <a:pPr algn="ctr"/>
+                      <a:r>
+                        <a:rPr lang="ko-KR" sz="1100" b="0">
+                          <a:solidFill>
+                            <a:srgbClr val="333333"/>
+                          </a:solidFill>
+                        </a:rPr>
+                        <a:t>41</a:t>
+                      </a:r>
+                    </a:p>
+                  </a:txBody>
+                  <a:tcPr anchor="ctr" marL="0" marR="0" marT="0" marB="0">
+                    <a:lnL w="6350">
+                      <a:solidFill>
+                        <a:srgbClr val="BBBBBB"/>
+                      </a:solidFill>
+                    </a:lnL>
+                    <a:lnR w="6350">
+                      <a:solidFill>
+                        <a:srgbClr val="BBBBBB"/>
+                      </a:solidFill>
+                    </a:lnR>
+                    <a:lnT w="6350">
+                      <a:solidFill>
+                        <a:srgbClr val="BBBBBB"/>
+                      </a:solidFill>
+                    </a:lnT>
+                    <a:lnB w="6350">
+                      <a:solidFill>
+                        <a:srgbClr val="BBBBBB"/>
+                      </a:solidFill>
+                    </a:lnB>
+                    <a:solidFill>
+                      <a:srgbClr val="FFFFFF"/>
+                    </a:solidFill>
+                  </a:tcPr>
+                </a:tc>
+                <a:tc>
+                  <a:txBody>
+                    <a:bodyPr lIns="9525" rIns="9525" tIns="6350" bIns="6350" anchor="ctr"/>
+                    <a:lstStyle/>
+                    <a:p>
+                      <a:pPr algn="ctr"/>
+                      <a:r>
                         <a:rPr lang="ko-KR" sz="1100" b="1">
                           <a:solidFill>
                             <a:srgbClr val="FFFFFF"/>
                           </a:solidFill>
                         </a:rPr>
-                        <a:t>39</a:t>
+                        <a:t>42</a:t>
                       </a:r>
                     </a:p>
                   </a:txBody>
@@ -17020,132 +17137,6 @@
                     </a:lnB>
                     <a:solidFill>
                       <a:srgbClr val="C00000"/>
-                    </a:solidFill>
-                  </a:tcPr>
-                </a:tc>
-                <a:tc>
-                  <a:txBody>
-                    <a:bodyPr lIns="9525" rIns="9525" tIns="6350" bIns="6350" anchor="ctr"/>
-                    <a:lstStyle/>
-                    <a:p>
-                      <a:pPr algn="ctr"/>
-                      <a:r>
-                        <a:rPr lang="ko-KR" sz="1100" b="0">
-                          <a:solidFill>
-                            <a:srgbClr val="333333"/>
-                          </a:solidFill>
-                        </a:rPr>
-                        <a:t>40</a:t>
-                      </a:r>
-                    </a:p>
-                  </a:txBody>
-                  <a:tcPr anchor="ctr" marL="0" marR="0" marT="0" marB="0">
-                    <a:lnL w="6350">
-                      <a:solidFill>
-                        <a:srgbClr val="BBBBBB"/>
-                      </a:solidFill>
-                    </a:lnL>
-                    <a:lnR w="6350">
-                      <a:solidFill>
-                        <a:srgbClr val="BBBBBB"/>
-                      </a:solidFill>
-                    </a:lnR>
-                    <a:lnT w="6350">
-                      <a:solidFill>
-                        <a:srgbClr val="BBBBBB"/>
-                      </a:solidFill>
-                    </a:lnT>
-                    <a:lnB w="6350">
-                      <a:solidFill>
-                        <a:srgbClr val="BBBBBB"/>
-                      </a:solidFill>
-                    </a:lnB>
-                    <a:solidFill>
-                      <a:srgbClr val="FFFFFF"/>
-                    </a:solidFill>
-                  </a:tcPr>
-                </a:tc>
-                <a:tc>
-                  <a:txBody>
-                    <a:bodyPr lIns="9525" rIns="9525" tIns="6350" bIns="6350" anchor="ctr"/>
-                    <a:lstStyle/>
-                    <a:p>
-                      <a:pPr algn="ctr"/>
-                      <a:r>
-                        <a:rPr lang="ko-KR" sz="1100" b="0">
-                          <a:solidFill>
-                            <a:srgbClr val="333333"/>
-                          </a:solidFill>
-                        </a:rPr>
-                        <a:t>41</a:t>
-                      </a:r>
-                    </a:p>
-                  </a:txBody>
-                  <a:tcPr anchor="ctr" marL="0" marR="0" marT="0" marB="0">
-                    <a:lnL w="6350">
-                      <a:solidFill>
-                        <a:srgbClr val="BBBBBB"/>
-                      </a:solidFill>
-                    </a:lnL>
-                    <a:lnR w="6350">
-                      <a:solidFill>
-                        <a:srgbClr val="BBBBBB"/>
-                      </a:solidFill>
-                    </a:lnR>
-                    <a:lnT w="6350">
-                      <a:solidFill>
-                        <a:srgbClr val="BBBBBB"/>
-                      </a:solidFill>
-                    </a:lnT>
-                    <a:lnB w="6350">
-                      <a:solidFill>
-                        <a:srgbClr val="BBBBBB"/>
-                      </a:solidFill>
-                    </a:lnB>
-                    <a:solidFill>
-                      <a:srgbClr val="FFFFFF"/>
-                    </a:solidFill>
-                  </a:tcPr>
-                </a:tc>
-                <a:tc>
-                  <a:txBody>
-                    <a:bodyPr lIns="9525" rIns="9525" tIns="6350" bIns="6350" anchor="ctr"/>
-                    <a:lstStyle/>
-                    <a:p>
-                      <a:pPr algn="ctr"/>
-                      <a:r>
-                        <a:rPr lang="ko-KR" sz="1100" b="0">
-                          <a:solidFill>
-                            <a:srgbClr val="333333"/>
-                          </a:solidFill>
-                        </a:rPr>
-                        <a:t>42</a:t>
-                      </a:r>
-                    </a:p>
-                  </a:txBody>
-                  <a:tcPr anchor="ctr" marL="0" marR="0" marT="0" marB="0">
-                    <a:lnL w="6350">
-                      <a:solidFill>
-                        <a:srgbClr val="BBBBBB"/>
-                      </a:solidFill>
-                    </a:lnL>
-                    <a:lnR w="6350">
-                      <a:solidFill>
-                        <a:srgbClr val="BBBBBB"/>
-                      </a:solidFill>
-                    </a:lnR>
-                    <a:lnT w="6350">
-                      <a:solidFill>
-                        <a:srgbClr val="BBBBBB"/>
-                      </a:solidFill>
-                    </a:lnT>
-                    <a:lnB w="6350">
-                      <a:solidFill>
-                        <a:srgbClr val="BBBBBB"/>
-                      </a:solidFill>
-                    </a:lnB>
-                    <a:solidFill>
-                      <a:srgbClr val="FFFFFF"/>
                     </a:solidFill>
                   </a:tcPr>
                 </a:tc>
@@ -17158,9 +17149,9 @@
                     <a:p>
                       <a:pPr algn="ctr"/>
                       <a:r>
-                        <a:rPr lang="ko-KR" sz="1100" b="1">
-                          <a:solidFill>
-                            <a:srgbClr val="FFFFFF"/>
+                        <a:rPr lang="ko-KR" sz="1100" b="0">
+                          <a:solidFill>
+                            <a:srgbClr val="333333"/>
                           </a:solidFill>
                         </a:rPr>
                         <a:t>43</a:t>
@@ -17189,7 +17180,7 @@
                       </a:solidFill>
                     </a:lnB>
                     <a:solidFill>
-                      <a:srgbClr val="C00000"/>
+                      <a:srgbClr val="FFFFFF"/>
                     </a:solidFill>
                   </a:tcPr>
                 </a:tc>
@@ -17444,7 +17435,7 @@
                   <a:srgbClr val="1F3864"/>
                 </a:solidFill>
               </a:rPr>
-              <a:t>02 15 24 30 39 43</a:t>
+              <a:t>18 23 24 31 36 42</a:t>
             </a:r>
           </a:p>
         </p:txBody>
@@ -17475,7 +17466,7 @@
                   <a:srgbClr val="808080"/>
                 </a:solidFill>
               </a:rPr>
-              <a:t>합 153 · 홀3:짝3</a:t>
+              <a:t>합 174 · 홀2:짝4</a:t>
             </a:r>
           </a:p>
         </p:txBody>
@@ -17880,9 +17871,9 @@
                     <a:p>
                       <a:pPr algn="ctr"/>
                       <a:r>
-                        <a:rPr lang="ko-KR" sz="1100" b="1">
-                          <a:solidFill>
-                            <a:srgbClr val="FFFFFF"/>
+                        <a:rPr lang="ko-KR" sz="1100" b="0">
+                          <a:solidFill>
+                            <a:srgbClr val="333333"/>
                           </a:solidFill>
                         </a:rPr>
                         <a:t>9</a:t>
@@ -17911,7 +17902,7 @@
                       </a:solidFill>
                     </a:lnB>
                     <a:solidFill>
-                      <a:srgbClr val="C00000"/>
+                      <a:srgbClr val="FFFFFF"/>
                     </a:solidFill>
                   </a:tcPr>
                 </a:tc>
@@ -18134,12 +18125,138 @@
                     <a:p>
                       <a:pPr algn="ctr"/>
                       <a:r>
+                        <a:rPr lang="ko-KR" sz="1100" b="0">
+                          <a:solidFill>
+                            <a:srgbClr val="333333"/>
+                          </a:solidFill>
+                        </a:rPr>
+                        <a:t>15</a:t>
+                      </a:r>
+                    </a:p>
+                  </a:txBody>
+                  <a:tcPr anchor="ctr" marL="0" marR="0" marT="0" marB="0">
+                    <a:lnL w="6350">
+                      <a:solidFill>
+                        <a:srgbClr val="BBBBBB"/>
+                      </a:solidFill>
+                    </a:lnL>
+                    <a:lnR w="6350">
+                      <a:solidFill>
+                        <a:srgbClr val="BBBBBB"/>
+                      </a:solidFill>
+                    </a:lnR>
+                    <a:lnT w="6350">
+                      <a:solidFill>
+                        <a:srgbClr val="BBBBBB"/>
+                      </a:solidFill>
+                    </a:lnT>
+                    <a:lnB w="6350">
+                      <a:solidFill>
+                        <a:srgbClr val="BBBBBB"/>
+                      </a:solidFill>
+                    </a:lnB>
+                    <a:solidFill>
+                      <a:srgbClr val="FFFFFF"/>
+                    </a:solidFill>
+                  </a:tcPr>
+                </a:tc>
+                <a:tc>
+                  <a:txBody>
+                    <a:bodyPr lIns="9525" rIns="9525" tIns="6350" bIns="6350" anchor="ctr"/>
+                    <a:lstStyle/>
+                    <a:p>
+                      <a:pPr algn="ctr"/>
+                      <a:r>
+                        <a:rPr lang="ko-KR" sz="1100" b="0">
+                          <a:solidFill>
+                            <a:srgbClr val="333333"/>
+                          </a:solidFill>
+                        </a:rPr>
+                        <a:t>16</a:t>
+                      </a:r>
+                    </a:p>
+                  </a:txBody>
+                  <a:tcPr anchor="ctr" marL="0" marR="0" marT="0" marB="0">
+                    <a:lnL w="6350">
+                      <a:solidFill>
+                        <a:srgbClr val="BBBBBB"/>
+                      </a:solidFill>
+                    </a:lnL>
+                    <a:lnR w="6350">
+                      <a:solidFill>
+                        <a:srgbClr val="BBBBBB"/>
+                      </a:solidFill>
+                    </a:lnR>
+                    <a:lnT w="6350">
+                      <a:solidFill>
+                        <a:srgbClr val="BBBBBB"/>
+                      </a:solidFill>
+                    </a:lnT>
+                    <a:lnB w="6350">
+                      <a:solidFill>
+                        <a:srgbClr val="BBBBBB"/>
+                      </a:solidFill>
+                    </a:lnB>
+                    <a:solidFill>
+                      <a:srgbClr val="FFFFFF"/>
+                    </a:solidFill>
+                  </a:tcPr>
+                </a:tc>
+                <a:tc>
+                  <a:txBody>
+                    <a:bodyPr lIns="9525" rIns="9525" tIns="6350" bIns="6350" anchor="ctr"/>
+                    <a:lstStyle/>
+                    <a:p>
+                      <a:pPr algn="ctr"/>
+                      <a:r>
+                        <a:rPr lang="ko-KR" sz="1100" b="0">
+                          <a:solidFill>
+                            <a:srgbClr val="333333"/>
+                          </a:solidFill>
+                        </a:rPr>
+                        <a:t>17</a:t>
+                      </a:r>
+                    </a:p>
+                  </a:txBody>
+                  <a:tcPr anchor="ctr" marL="0" marR="0" marT="0" marB="0">
+                    <a:lnL w="6350">
+                      <a:solidFill>
+                        <a:srgbClr val="BBBBBB"/>
+                      </a:solidFill>
+                    </a:lnL>
+                    <a:lnR w="6350">
+                      <a:solidFill>
+                        <a:srgbClr val="BBBBBB"/>
+                      </a:solidFill>
+                    </a:lnR>
+                    <a:lnT w="6350">
+                      <a:solidFill>
+                        <a:srgbClr val="BBBBBB"/>
+                      </a:solidFill>
+                    </a:lnT>
+                    <a:lnB w="6350">
+                      <a:solidFill>
+                        <a:srgbClr val="BBBBBB"/>
+                      </a:solidFill>
+                    </a:lnB>
+                    <a:solidFill>
+                      <a:srgbClr val="FFFFFF"/>
+                    </a:solidFill>
+                  </a:tcPr>
+                </a:tc>
+                <a:tc>
+                  <a:txBody>
+                    <a:bodyPr lIns="9525" rIns="9525" tIns="6350" bIns="6350" anchor="ctr"/>
+                    <a:lstStyle/>
+                    <a:p>
+                      <a:pPr algn="ctr"/>
+                      <a:r>
                         <a:rPr lang="ko-KR" sz="1100" b="1">
                           <a:solidFill>
                             <a:srgbClr val="FFFFFF"/>
                           </a:solidFill>
                         </a:rPr>
-                        <a:t>15</a:t>
+                        <a:t>18</a:t>
                       </a:r>
                     </a:p>
                   </a:txBody>
@@ -18166,132 +18283,6 @@
                     </a:lnB>
                     <a:solidFill>
                       <a:srgbClr val="C00000"/>
-                    </a:solidFill>
-                  </a:tcPr>
-                </a:tc>
-                <a:tc>
-                  <a:txBody>
-                    <a:bodyPr lIns="9525" rIns="9525" tIns="6350" bIns="6350" anchor="ctr"/>
-                    <a:lstStyle/>
-                    <a:p>
-                      <a:pPr algn="ctr"/>
-                      <a:r>
-                        <a:rPr lang="ko-KR" sz="1100" b="0">
-                          <a:solidFill>
-                            <a:srgbClr val="333333"/>
-                          </a:solidFill>
-                        </a:rPr>
-                        <a:t>16</a:t>
-                      </a:r>
-                    </a:p>
-                  </a:txBody>
-                  <a:tcPr anchor="ctr" marL="0" marR="0" marT="0" marB="0">
-                    <a:lnL w="6350">
-                      <a:solidFill>
-                        <a:srgbClr val="BBBBBB"/>
-                      </a:solidFill>
-                    </a:lnL>
-                    <a:lnR w="6350">
-                      <a:solidFill>
-                        <a:srgbClr val="BBBBBB"/>
-                      </a:solidFill>
-                    </a:lnR>
-                    <a:lnT w="6350">
-                      <a:solidFill>
-                        <a:srgbClr val="BBBBBB"/>
-                      </a:solidFill>
-                    </a:lnT>
-                    <a:lnB w="6350">
-                      <a:solidFill>
-                        <a:srgbClr val="BBBBBB"/>
-                      </a:solidFill>
-                    </a:lnB>
-                    <a:solidFill>
-                      <a:srgbClr val="FFFFFF"/>
-                    </a:solidFill>
-                  </a:tcPr>
-                </a:tc>
-                <a:tc>
-                  <a:txBody>
-                    <a:bodyPr lIns="9525" rIns="9525" tIns="6350" bIns="6350" anchor="ctr"/>
-                    <a:lstStyle/>
-                    <a:p>
-                      <a:pPr algn="ctr"/>
-                      <a:r>
-                        <a:rPr lang="ko-KR" sz="1100" b="0">
-                          <a:solidFill>
-                            <a:srgbClr val="333333"/>
-                          </a:solidFill>
-                        </a:rPr>
-                        <a:t>17</a:t>
-                      </a:r>
-                    </a:p>
-                  </a:txBody>
-                  <a:tcPr anchor="ctr" marL="0" marR="0" marT="0" marB="0">
-                    <a:lnL w="6350">
-                      <a:solidFill>
-                        <a:srgbClr val="BBBBBB"/>
-                      </a:solidFill>
-                    </a:lnL>
-                    <a:lnR w="6350">
-                      <a:solidFill>
-                        <a:srgbClr val="BBBBBB"/>
-                      </a:solidFill>
-                    </a:lnR>
-                    <a:lnT w="6350">
-                      <a:solidFill>
-                        <a:srgbClr val="BBBBBB"/>
-                      </a:solidFill>
-                    </a:lnT>
-                    <a:lnB w="6350">
-                      <a:solidFill>
-                        <a:srgbClr val="BBBBBB"/>
-                      </a:solidFill>
-                    </a:lnB>
-                    <a:solidFill>
-                      <a:srgbClr val="FFFFFF"/>
-                    </a:solidFill>
-                  </a:tcPr>
-                </a:tc>
-                <a:tc>
-                  <a:txBody>
-                    <a:bodyPr lIns="9525" rIns="9525" tIns="6350" bIns="6350" anchor="ctr"/>
-                    <a:lstStyle/>
-                    <a:p>
-                      <a:pPr algn="ctr"/>
-                      <a:r>
-                        <a:rPr lang="ko-KR" sz="1100" b="0">
-                          <a:solidFill>
-                            <a:srgbClr val="333333"/>
-                          </a:solidFill>
-                        </a:rPr>
-                        <a:t>18</a:t>
-                      </a:r>
-                    </a:p>
-                  </a:txBody>
-                  <a:tcPr anchor="ctr" marL="0" marR="0" marT="0" marB="0">
-                    <a:lnL w="6350">
-                      <a:solidFill>
-                        <a:srgbClr val="BBBBBB"/>
-                      </a:solidFill>
-                    </a:lnL>
-                    <a:lnR w="6350">
-                      <a:solidFill>
-                        <a:srgbClr val="BBBBBB"/>
-                      </a:solidFill>
-                    </a:lnR>
-                    <a:lnT w="6350">
-                      <a:solidFill>
-                        <a:srgbClr val="BBBBBB"/>
-                      </a:solidFill>
-                    </a:lnT>
-                    <a:lnB w="6350">
-                      <a:solidFill>
-                        <a:srgbClr val="BBBBBB"/>
-                      </a:solidFill>
-                    </a:lnB>
-                    <a:solidFill>
-                      <a:srgbClr val="FFFFFF"/>
                     </a:solidFill>
                   </a:tcPr>
                 </a:tc>
@@ -18472,12 +18463,54 @@
                     <a:p>
                       <a:pPr algn="ctr"/>
                       <a:r>
+                        <a:rPr lang="ko-KR" sz="1100" b="1">
+                          <a:solidFill>
+                            <a:srgbClr val="FFFFFF"/>
+                          </a:solidFill>
+                        </a:rPr>
+                        <a:t>23</a:t>
+                      </a:r>
+                    </a:p>
+                  </a:txBody>
+                  <a:tcPr anchor="ctr" marL="0" marR="0" marT="0" marB="0">
+                    <a:lnL w="6350">
+                      <a:solidFill>
+                        <a:srgbClr val="BBBBBB"/>
+                      </a:solidFill>
+                    </a:lnL>
+                    <a:lnR w="6350">
+                      <a:solidFill>
+                        <a:srgbClr val="BBBBBB"/>
+                      </a:solidFill>
+                    </a:lnR>
+                    <a:lnT w="6350">
+                      <a:solidFill>
+                        <a:srgbClr val="BBBBBB"/>
+                      </a:solidFill>
+                    </a:lnT>
+                    <a:lnB w="6350">
+                      <a:solidFill>
+                        <a:srgbClr val="BBBBBB"/>
+                      </a:solidFill>
+                    </a:lnB>
+                    <a:solidFill>
+                      <a:srgbClr val="C00000"/>
+                    </a:solidFill>
+                  </a:tcPr>
+                </a:tc>
+                <a:tc>
+                  <a:txBody>
+                    <a:bodyPr lIns="9525" rIns="9525" tIns="6350" bIns="6350" anchor="ctr"/>
+                    <a:lstStyle/>
+                    <a:p>
+                      <a:pPr algn="ctr"/>
+                      <a:r>
                         <a:rPr lang="ko-KR" sz="1100" b="0">
                           <a:solidFill>
                             <a:srgbClr val="333333"/>
                           </a:solidFill>
                         </a:rPr>
-                        <a:t>23</a:t>
+                        <a:t>24</a:t>
                       </a:r>
                     </a:p>
                   </a:txBody>
@@ -18514,12 +18547,138 @@
                     <a:p>
                       <a:pPr algn="ctr"/>
                       <a:r>
+                        <a:rPr lang="ko-KR" sz="1100" b="0">
+                          <a:solidFill>
+                            <a:srgbClr val="333333"/>
+                          </a:solidFill>
+                        </a:rPr>
+                        <a:t>25</a:t>
+                      </a:r>
+                    </a:p>
+                  </a:txBody>
+                  <a:tcPr anchor="ctr" marL="0" marR="0" marT="0" marB="0">
+                    <a:lnL w="6350">
+                      <a:solidFill>
+                        <a:srgbClr val="BBBBBB"/>
+                      </a:solidFill>
+                    </a:lnL>
+                    <a:lnR w="6350">
+                      <a:solidFill>
+                        <a:srgbClr val="BBBBBB"/>
+                      </a:solidFill>
+                    </a:lnR>
+                    <a:lnT w="6350">
+                      <a:solidFill>
+                        <a:srgbClr val="BBBBBB"/>
+                      </a:solidFill>
+                    </a:lnT>
+                    <a:lnB w="6350">
+                      <a:solidFill>
+                        <a:srgbClr val="BBBBBB"/>
+                      </a:solidFill>
+                    </a:lnB>
+                    <a:solidFill>
+                      <a:srgbClr val="FFFFFF"/>
+                    </a:solidFill>
+                  </a:tcPr>
+                </a:tc>
+                <a:tc>
+                  <a:txBody>
+                    <a:bodyPr lIns="9525" rIns="9525" tIns="6350" bIns="6350" anchor="ctr"/>
+                    <a:lstStyle/>
+                    <a:p>
+                      <a:pPr algn="ctr"/>
+                      <a:r>
+                        <a:rPr lang="ko-KR" sz="1100" b="0">
+                          <a:solidFill>
+                            <a:srgbClr val="333333"/>
+                          </a:solidFill>
+                        </a:rPr>
+                        <a:t>26</a:t>
+                      </a:r>
+                    </a:p>
+                  </a:txBody>
+                  <a:tcPr anchor="ctr" marL="0" marR="0" marT="0" marB="0">
+                    <a:lnL w="6350">
+                      <a:solidFill>
+                        <a:srgbClr val="BBBBBB"/>
+                      </a:solidFill>
+                    </a:lnL>
+                    <a:lnR w="6350">
+                      <a:solidFill>
+                        <a:srgbClr val="BBBBBB"/>
+                      </a:solidFill>
+                    </a:lnR>
+                    <a:lnT w="6350">
+                      <a:solidFill>
+                        <a:srgbClr val="BBBBBB"/>
+                      </a:solidFill>
+                    </a:lnT>
+                    <a:lnB w="6350">
+                      <a:solidFill>
+                        <a:srgbClr val="BBBBBB"/>
+                      </a:solidFill>
+                    </a:lnB>
+                    <a:solidFill>
+                      <a:srgbClr val="FFFFFF"/>
+                    </a:solidFill>
+                  </a:tcPr>
+                </a:tc>
+                <a:tc>
+                  <a:txBody>
+                    <a:bodyPr lIns="9525" rIns="9525" tIns="6350" bIns="6350" anchor="ctr"/>
+                    <a:lstStyle/>
+                    <a:p>
+                      <a:pPr algn="ctr"/>
+                      <a:r>
+                        <a:rPr lang="ko-KR" sz="1100" b="0">
+                          <a:solidFill>
+                            <a:srgbClr val="333333"/>
+                          </a:solidFill>
+                        </a:rPr>
+                        <a:t>27</a:t>
+                      </a:r>
+                    </a:p>
+                  </a:txBody>
+                  <a:tcPr anchor="ctr" marL="0" marR="0" marT="0" marB="0">
+                    <a:lnL w="6350">
+                      <a:solidFill>
+                        <a:srgbClr val="BBBBBB"/>
+                      </a:solidFill>
+                    </a:lnL>
+                    <a:lnR w="6350">
+                      <a:solidFill>
+                        <a:srgbClr val="BBBBBB"/>
+                      </a:solidFill>
+                    </a:lnR>
+                    <a:lnT w="6350">
+                      <a:solidFill>
+                        <a:srgbClr val="BBBBBB"/>
+                      </a:solidFill>
+                    </a:lnT>
+                    <a:lnB w="6350">
+                      <a:solidFill>
+                        <a:srgbClr val="BBBBBB"/>
+                      </a:solidFill>
+                    </a:lnB>
+                    <a:solidFill>
+                      <a:srgbClr val="FFFFFF"/>
+                    </a:solidFill>
+                  </a:tcPr>
+                </a:tc>
+                <a:tc>
+                  <a:txBody>
+                    <a:bodyPr lIns="9525" rIns="9525" tIns="6350" bIns="6350" anchor="ctr"/>
+                    <a:lstStyle/>
+                    <a:p>
+                      <a:pPr algn="ctr"/>
+                      <a:r>
                         <a:rPr lang="ko-KR" sz="1100" b="1">
                           <a:solidFill>
                             <a:srgbClr val="FFFFFF"/>
                           </a:solidFill>
                         </a:rPr>
-                        <a:t>24</a:t>
+                        <a:t>28</a:t>
                       </a:r>
                     </a:p>
                   </a:txBody>
@@ -18546,174 +18705,6 @@
                     </a:lnB>
                     <a:solidFill>
                       <a:srgbClr val="C00000"/>
-                    </a:solidFill>
-                  </a:tcPr>
-                </a:tc>
-                <a:tc>
-                  <a:txBody>
-                    <a:bodyPr lIns="9525" rIns="9525" tIns="6350" bIns="6350" anchor="ctr"/>
-                    <a:lstStyle/>
-                    <a:p>
-                      <a:pPr algn="ctr"/>
-                      <a:r>
-                        <a:rPr lang="ko-KR" sz="1100" b="0">
-                          <a:solidFill>
-                            <a:srgbClr val="333333"/>
-                          </a:solidFill>
-                        </a:rPr>
-                        <a:t>25</a:t>
-                      </a:r>
-                    </a:p>
-                  </a:txBody>
-                  <a:tcPr anchor="ctr" marL="0" marR="0" marT="0" marB="0">
-                    <a:lnL w="6350">
-                      <a:solidFill>
-                        <a:srgbClr val="BBBBBB"/>
-                      </a:solidFill>
-                    </a:lnL>
-                    <a:lnR w="6350">
-                      <a:solidFill>
-                        <a:srgbClr val="BBBBBB"/>
-                      </a:solidFill>
-                    </a:lnR>
-                    <a:lnT w="6350">
-                      <a:solidFill>
-                        <a:srgbClr val="BBBBBB"/>
-                      </a:solidFill>
-                    </a:lnT>
-                    <a:lnB w="6350">
-                      <a:solidFill>
-                        <a:srgbClr val="BBBBBB"/>
-                      </a:solidFill>
-                    </a:lnB>
-                    <a:solidFill>
-                      <a:srgbClr val="FFFFFF"/>
-                    </a:solidFill>
-                  </a:tcPr>
-                </a:tc>
-                <a:tc>
-                  <a:txBody>
-                    <a:bodyPr lIns="9525" rIns="9525" tIns="6350" bIns="6350" anchor="ctr"/>
-                    <a:lstStyle/>
-                    <a:p>
-                      <a:pPr algn="ctr"/>
-                      <a:r>
-                        <a:rPr lang="ko-KR" sz="1100" b="0">
-                          <a:solidFill>
-                            <a:srgbClr val="333333"/>
-                          </a:solidFill>
-                        </a:rPr>
-                        <a:t>26</a:t>
-                      </a:r>
-                    </a:p>
-                  </a:txBody>
-                  <a:tcPr anchor="ctr" marL="0" marR="0" marT="0" marB="0">
-                    <a:lnL w="6350">
-                      <a:solidFill>
-                        <a:srgbClr val="BBBBBB"/>
-                      </a:solidFill>
-                    </a:lnL>
-                    <a:lnR w="6350">
-                      <a:solidFill>
-                        <a:srgbClr val="BBBBBB"/>
-                      </a:solidFill>
-                    </a:lnR>
-                    <a:lnT w="6350">
-                      <a:solidFill>
-                        <a:srgbClr val="BBBBBB"/>
-                      </a:solidFill>
-                    </a:lnT>
-                    <a:lnB w="6350">
-                      <a:solidFill>
-                        <a:srgbClr val="BBBBBB"/>
-                      </a:solidFill>
-                    </a:lnB>
-                    <a:solidFill>
-                      <a:srgbClr val="FFFFFF"/>
-                    </a:solidFill>
-                  </a:tcPr>
-                </a:tc>
-                <a:tc>
-                  <a:txBody>
-                    <a:bodyPr lIns="9525" rIns="9525" tIns="6350" bIns="6350" anchor="ctr"/>
-                    <a:lstStyle/>
-                    <a:p>
-                      <a:pPr algn="ctr"/>
-                      <a:r>
-                        <a:rPr lang="ko-KR" sz="1100" b="1">
-                          <a:solidFill>
-                            <a:srgbClr val="FFFFFF"/>
-                          </a:solidFill>
-                        </a:rPr>
-                        <a:t>27</a:t>
-                      </a:r>
-                    </a:p>
-                  </a:txBody>
-                  <a:tcPr anchor="ctr" marL="0" marR="0" marT="0" marB="0">
-                    <a:lnL w="6350">
-                      <a:solidFill>
-                        <a:srgbClr val="BBBBBB"/>
-                      </a:solidFill>
-                    </a:lnL>
-                    <a:lnR w="6350">
-                      <a:solidFill>
-                        <a:srgbClr val="BBBBBB"/>
-                      </a:solidFill>
-                    </a:lnR>
-                    <a:lnT w="6350">
-                      <a:solidFill>
-                        <a:srgbClr val="BBBBBB"/>
-                      </a:solidFill>
-                    </a:lnT>
-                    <a:lnB w="6350">
-                      <a:solidFill>
-                        <a:srgbClr val="BBBBBB"/>
-                      </a:solidFill>
-                    </a:lnB>
-                    <a:solidFill>
-                      <a:srgbClr val="C00000"/>
-                    </a:solidFill>
-                  </a:tcPr>
-                </a:tc>
-                <a:tc>
-                  <a:txBody>
-                    <a:bodyPr lIns="9525" rIns="9525" tIns="6350" bIns="6350" anchor="ctr"/>
-                    <a:lstStyle/>
-                    <a:p>
-                      <a:pPr algn="ctr"/>
-                      <a:r>
-                        <a:rPr lang="ko-KR" sz="1100" b="0">
-                          <a:solidFill>
-                            <a:srgbClr val="333333"/>
-                          </a:solidFill>
-                        </a:rPr>
-                        <a:t>28</a:t>
-                      </a:r>
-                    </a:p>
-                  </a:txBody>
-                  <a:tcPr anchor="ctr" marL="0" marR="0" marT="0" marB="0">
-                    <a:lnL w="6350">
-                      <a:solidFill>
-                        <a:srgbClr val="BBBBBB"/>
-                      </a:solidFill>
-                    </a:lnL>
-                    <a:lnR w="6350">
-                      <a:solidFill>
-                        <a:srgbClr val="BBBBBB"/>
-                      </a:solidFill>
-                    </a:lnR>
-                    <a:lnT w="6350">
-                      <a:solidFill>
-                        <a:srgbClr val="BBBBBB"/>
-                      </a:solidFill>
-                    </a:lnT>
-                    <a:lnB w="6350">
-                      <a:solidFill>
-                        <a:srgbClr val="BBBBBB"/>
-                      </a:solidFill>
-                    </a:lnB>
-                    <a:solidFill>
-                      <a:srgbClr val="FFFFFF"/>
                     </a:solidFill>
                   </a:tcPr>
                 </a:tc>
@@ -18768,12 +18759,54 @@
                     <a:p>
                       <a:pPr algn="ctr"/>
                       <a:r>
+                        <a:rPr lang="ko-KR" sz="1100" b="1">
+                          <a:solidFill>
+                            <a:srgbClr val="FFFFFF"/>
+                          </a:solidFill>
+                        </a:rPr>
+                        <a:t>30</a:t>
+                      </a:r>
+                    </a:p>
+                  </a:txBody>
+                  <a:tcPr anchor="ctr" marL="0" marR="0" marT="0" marB="0">
+                    <a:lnL w="6350">
+                      <a:solidFill>
+                        <a:srgbClr val="BBBBBB"/>
+                      </a:solidFill>
+                    </a:lnL>
+                    <a:lnR w="6350">
+                      <a:solidFill>
+                        <a:srgbClr val="BBBBBB"/>
+                      </a:solidFill>
+                    </a:lnR>
+                    <a:lnT w="6350">
+                      <a:solidFill>
+                        <a:srgbClr val="BBBBBB"/>
+                      </a:solidFill>
+                    </a:lnT>
+                    <a:lnB w="6350">
+                      <a:solidFill>
+                        <a:srgbClr val="BBBBBB"/>
+                      </a:solidFill>
+                    </a:lnB>
+                    <a:solidFill>
+                      <a:srgbClr val="C00000"/>
+                    </a:solidFill>
+                  </a:tcPr>
+                </a:tc>
+                <a:tc>
+                  <a:txBody>
+                    <a:bodyPr lIns="9525" rIns="9525" tIns="6350" bIns="6350" anchor="ctr"/>
+                    <a:lstStyle/>
+                    <a:p>
+                      <a:pPr algn="ctr"/>
+                      <a:r>
                         <a:rPr lang="ko-KR" sz="1100" b="0">
                           <a:solidFill>
                             <a:srgbClr val="333333"/>
                           </a:solidFill>
                         </a:rPr>
-                        <a:t>30</a:t>
+                        <a:t>31</a:t>
                       </a:r>
                     </a:p>
                   </a:txBody>
@@ -18815,7 +18848,7 @@
                             <a:srgbClr val="333333"/>
                           </a:solidFill>
                         </a:rPr>
-                        <a:t>31</a:t>
+                        <a:t>32</a:t>
                       </a:r>
                     </a:p>
                   </a:txBody>
@@ -18857,7 +18890,7 @@
                             <a:srgbClr val="333333"/>
                           </a:solidFill>
                         </a:rPr>
-                        <a:t>32</a:t>
+                        <a:t>33</a:t>
                       </a:r>
                     </a:p>
                   </a:txBody>
@@ -18899,7 +18932,7 @@
                             <a:srgbClr val="333333"/>
                           </a:solidFill>
                         </a:rPr>
-                        <a:t>33</a:t>
+                        <a:t>34</a:t>
                       </a:r>
                     </a:p>
                   </a:txBody>
@@ -18926,48 +18959,6 @@
                     </a:lnB>
                     <a:solidFill>
                       <a:srgbClr val="FFFFFF"/>
-                    </a:solidFill>
-                  </a:tcPr>
-                </a:tc>
-                <a:tc>
-                  <a:txBody>
-                    <a:bodyPr lIns="9525" rIns="9525" tIns="6350" bIns="6350" anchor="ctr"/>
-                    <a:lstStyle/>
-                    <a:p>
-                      <a:pPr algn="ctr"/>
-                      <a:r>
-                        <a:rPr lang="ko-KR" sz="1100" b="1">
-                          <a:solidFill>
-                            <a:srgbClr val="FFFFFF"/>
-                          </a:solidFill>
-                        </a:rPr>
-                        <a:t>34</a:t>
-                      </a:r>
-                    </a:p>
-                  </a:txBody>
-                  <a:tcPr anchor="ctr" marL="0" marR="0" marT="0" marB="0">
-                    <a:lnL w="6350">
-                      <a:solidFill>
-                        <a:srgbClr val="BBBBBB"/>
-                      </a:solidFill>
-                    </a:lnL>
-                    <a:lnR w="6350">
-                      <a:solidFill>
-                        <a:srgbClr val="BBBBBB"/>
-                      </a:solidFill>
-                    </a:lnR>
-                    <a:lnT w="6350">
-                      <a:solidFill>
-                        <a:srgbClr val="BBBBBB"/>
-                      </a:solidFill>
-                    </a:lnT>
-                    <a:lnB w="6350">
-                      <a:solidFill>
-                        <a:srgbClr val="BBBBBB"/>
-                      </a:solidFill>
-                    </a:lnB>
-                    <a:solidFill>
-                      <a:srgbClr val="C00000"/>
                     </a:solidFill>
                   </a:tcPr>
                 </a:tc>
@@ -19022,12 +19013,54 @@
                     <a:p>
                       <a:pPr algn="ctr"/>
                       <a:r>
+                        <a:rPr lang="ko-KR" sz="1100" b="1">
+                          <a:solidFill>
+                            <a:srgbClr val="FFFFFF"/>
+                          </a:solidFill>
+                        </a:rPr>
+                        <a:t>36</a:t>
+                      </a:r>
+                    </a:p>
+                  </a:txBody>
+                  <a:tcPr anchor="ctr" marL="0" marR="0" marT="0" marB="0">
+                    <a:lnL w="6350">
+                      <a:solidFill>
+                        <a:srgbClr val="BBBBBB"/>
+                      </a:solidFill>
+                    </a:lnL>
+                    <a:lnR w="6350">
+                      <a:solidFill>
+                        <a:srgbClr val="BBBBBB"/>
+                      </a:solidFill>
+                    </a:lnR>
+                    <a:lnT w="6350">
+                      <a:solidFill>
+                        <a:srgbClr val="BBBBBB"/>
+                      </a:solidFill>
+                    </a:lnT>
+                    <a:lnB w="6350">
+                      <a:solidFill>
+                        <a:srgbClr val="BBBBBB"/>
+                      </a:solidFill>
+                    </a:lnB>
+                    <a:solidFill>
+                      <a:srgbClr val="C00000"/>
+                    </a:solidFill>
+                  </a:tcPr>
+                </a:tc>
+                <a:tc>
+                  <a:txBody>
+                    <a:bodyPr lIns="9525" rIns="9525" tIns="6350" bIns="6350" anchor="ctr"/>
+                    <a:lstStyle/>
+                    <a:p>
+                      <a:pPr algn="ctr"/>
+                      <a:r>
                         <a:rPr lang="ko-KR" sz="1100" b="0">
                           <a:solidFill>
                             <a:srgbClr val="333333"/>
                           </a:solidFill>
                         </a:rPr>
-                        <a:t>36</a:t>
+                        <a:t>37</a:t>
                       </a:r>
                     </a:p>
                   </a:txBody>
@@ -19069,7 +19102,7 @@
                             <a:srgbClr val="333333"/>
                           </a:solidFill>
                         </a:rPr>
-                        <a:t>37</a:t>
+                        <a:t>38</a:t>
                       </a:r>
                     </a:p>
                   </a:txBody>
@@ -19111,7 +19144,7 @@
                             <a:srgbClr val="FFFFFF"/>
                           </a:solidFill>
                         </a:rPr>
-                        <a:t>38</a:t>
+                        <a:t>39</a:t>
                       </a:r>
                     </a:p>
                   </a:txBody>
@@ -19138,48 +19171,6 @@
                     </a:lnB>
                     <a:solidFill>
                       <a:srgbClr val="C00000"/>
-                    </a:solidFill>
-                  </a:tcPr>
-                </a:tc>
-                <a:tc>
-                  <a:txBody>
-                    <a:bodyPr lIns="9525" rIns="9525" tIns="6350" bIns="6350" anchor="ctr"/>
-                    <a:lstStyle/>
-                    <a:p>
-                      <a:pPr algn="ctr"/>
-                      <a:r>
-                        <a:rPr lang="ko-KR" sz="1100" b="0">
-                          <a:solidFill>
-                            <a:srgbClr val="333333"/>
-                          </a:solidFill>
-                        </a:rPr>
-                        <a:t>39</a:t>
-                      </a:r>
-                    </a:p>
-                  </a:txBody>
-                  <a:tcPr anchor="ctr" marL="0" marR="0" marT="0" marB="0">
-                    <a:lnL w="6350">
-                      <a:solidFill>
-                        <a:srgbClr val="BBBBBB"/>
-                      </a:solidFill>
-                    </a:lnL>
-                    <a:lnR w="6350">
-                      <a:solidFill>
-                        <a:srgbClr val="BBBBBB"/>
-                      </a:solidFill>
-                    </a:lnR>
-                    <a:lnT w="6350">
-                      <a:solidFill>
-                        <a:srgbClr val="BBBBBB"/>
-                      </a:solidFill>
-                    </a:lnT>
-                    <a:lnB w="6350">
-                      <a:solidFill>
-                        <a:srgbClr val="BBBBBB"/>
-                      </a:solidFill>
-                    </a:lnB>
-                    <a:solidFill>
-                      <a:srgbClr val="FFFFFF"/>
                     </a:solidFill>
                   </a:tcPr>
                 </a:tc>
@@ -19604,7 +19595,7 @@
                   <a:srgbClr val="1F3864"/>
                 </a:solidFill>
               </a:rPr>
-              <a:t>09 15 24 27 34 38</a:t>
+              <a:t>18 23 28 30 36 39</a:t>
             </a:r>
           </a:p>
         </p:txBody>
@@ -19635,7 +19626,7 @@
                   <a:srgbClr val="808080"/>
                 </a:solidFill>
               </a:rPr>
-              <a:t>합 147 · 홀3:짝3</a:t>
+              <a:t>합 174 · 홀2:짝4</a:t>
             </a:r>
           </a:p>
         </p:txBody>
@@ -19786,9 +19777,9 @@
                     <a:p>
                       <a:pPr algn="ctr"/>
                       <a:r>
-                        <a:rPr lang="ko-KR" sz="1100" b="0">
-                          <a:solidFill>
-                            <a:srgbClr val="333333"/>
+                        <a:rPr lang="ko-KR" sz="1100" b="1">
+                          <a:solidFill>
+                            <a:srgbClr val="FFFFFF"/>
                           </a:solidFill>
                         </a:rPr>
                         <a:t>3</a:t>
@@ -19817,7 +19808,7 @@
                       </a:solidFill>
                     </a:lnB>
                     <a:solidFill>
-                      <a:srgbClr val="FFFFFF"/>
+                      <a:srgbClr val="C00000"/>
                     </a:solidFill>
                   </a:tcPr>
                 </a:tc>
@@ -20294,9 +20285,9 @@
                     <a:p>
                       <a:pPr algn="ctr"/>
                       <a:r>
-                        <a:rPr lang="ko-KR" sz="1100" b="0">
-                          <a:solidFill>
-                            <a:srgbClr val="333333"/>
+                        <a:rPr lang="ko-KR" sz="1100" b="1">
+                          <a:solidFill>
+                            <a:srgbClr val="FFFFFF"/>
                           </a:solidFill>
                         </a:rPr>
                         <a:t>15</a:t>
@@ -20325,7 +20316,7 @@
                       </a:solidFill>
                     </a:lnB>
                     <a:solidFill>
-                      <a:srgbClr val="FFFFFF"/>
+                      <a:srgbClr val="C00000"/>
                     </a:solidFill>
                   </a:tcPr>
                 </a:tc>
@@ -20674,9 +20665,9 @@
                     <a:p>
                       <a:pPr algn="ctr"/>
                       <a:r>
-                        <a:rPr lang="ko-KR" sz="1100" b="1">
-                          <a:solidFill>
-                            <a:srgbClr val="FFFFFF"/>
+                        <a:rPr lang="ko-KR" sz="1100" b="0">
+                          <a:solidFill>
+                            <a:srgbClr val="333333"/>
                           </a:solidFill>
                         </a:rPr>
                         <a:t>24</a:t>
@@ -20705,7 +20696,7 @@
                       </a:solidFill>
                     </a:lnB>
                     <a:solidFill>
-                      <a:srgbClr val="C00000"/>
+                      <a:srgbClr val="FFFFFF"/>
                     </a:solidFill>
                   </a:tcPr>
                 </a:tc>
@@ -21054,9 +21045,9 @@
                     <a:p>
                       <a:pPr algn="ctr"/>
                       <a:r>
-                        <a:rPr lang="ko-KR" sz="1100" b="1">
-                          <a:solidFill>
-                            <a:srgbClr val="FFFFFF"/>
+                        <a:rPr lang="ko-KR" sz="1100" b="0">
+                          <a:solidFill>
+                            <a:srgbClr val="333333"/>
                           </a:solidFill>
                         </a:rPr>
                         <a:t>33</a:t>
@@ -21085,20 +21076,20 @@
                       </a:solidFill>
                     </a:lnB>
                     <a:solidFill>
-                      <a:srgbClr val="C00000"/>
-                    </a:solidFill>
-                  </a:tcPr>
-                </a:tc>
-                <a:tc>
-                  <a:txBody>
-                    <a:bodyPr lIns="9525" rIns="9525" tIns="6350" bIns="6350" anchor="ctr"/>
-                    <a:lstStyle/>
-                    <a:p>
-                      <a:pPr algn="ctr"/>
-                      <a:r>
-                        <a:rPr lang="ko-KR" sz="1100" b="1">
-                          <a:solidFill>
-                            <a:srgbClr val="FFFFFF"/>
+                      <a:srgbClr val="FFFFFF"/>
+                    </a:solidFill>
+                  </a:tcPr>
+                </a:tc>
+                <a:tc>
+                  <a:txBody>
+                    <a:bodyPr lIns="9525" rIns="9525" tIns="6350" bIns="6350" anchor="ctr"/>
+                    <a:lstStyle/>
+                    <a:p>
+                      <a:pPr algn="ctr"/>
+                      <a:r>
+                        <a:rPr lang="ko-KR" sz="1100" b="0">
+                          <a:solidFill>
+                            <a:srgbClr val="333333"/>
                           </a:solidFill>
                         </a:rPr>
                         <a:t>34</a:t>
@@ -21127,20 +21118,20 @@
                       </a:solidFill>
                     </a:lnB>
                     <a:solidFill>
-                      <a:srgbClr val="C00000"/>
-                    </a:solidFill>
-                  </a:tcPr>
-                </a:tc>
-                <a:tc>
-                  <a:txBody>
-                    <a:bodyPr lIns="9525" rIns="9525" tIns="6350" bIns="6350" anchor="ctr"/>
-                    <a:lstStyle/>
-                    <a:p>
-                      <a:pPr algn="ctr"/>
-                      <a:r>
-                        <a:rPr lang="ko-KR" sz="1100" b="1">
-                          <a:solidFill>
-                            <a:srgbClr val="FFFFFF"/>
+                      <a:srgbClr val="FFFFFF"/>
+                    </a:solidFill>
+                  </a:tcPr>
+                </a:tc>
+                <a:tc>
+                  <a:txBody>
+                    <a:bodyPr lIns="9525" rIns="9525" tIns="6350" bIns="6350" anchor="ctr"/>
+                    <a:lstStyle/>
+                    <a:p>
+                      <a:pPr algn="ctr"/>
+                      <a:r>
+                        <a:rPr lang="ko-KR" sz="1100" b="0">
+                          <a:solidFill>
+                            <a:srgbClr val="333333"/>
                           </a:solidFill>
                         </a:rPr>
                         <a:t>35</a:t>
@@ -21169,7 +21160,7 @@
                       </a:solidFill>
                     </a:lnB>
                     <a:solidFill>
-                      <a:srgbClr val="C00000"/>
+                      <a:srgbClr val="FFFFFF"/>
                     </a:solidFill>
                   </a:tcPr>
                 </a:tc>
@@ -21434,9 +21425,9 @@
                     <a:p>
                       <a:pPr algn="ctr"/>
                       <a:r>
-                        <a:rPr lang="ko-KR" sz="1100" b="0">
-                          <a:solidFill>
-                            <a:srgbClr val="333333"/>
+                        <a:rPr lang="ko-KR" sz="1100" b="1">
+                          <a:solidFill>
+                            <a:srgbClr val="FFFFFF"/>
                           </a:solidFill>
                         </a:rPr>
                         <a:t>42</a:t>
@@ -21465,7 +21456,7 @@
                       </a:solidFill>
                     </a:lnB>
                     <a:solidFill>
-                      <a:srgbClr val="FFFFFF"/>
+                      <a:srgbClr val="C00000"/>
                     </a:solidFill>
                   </a:tcPr>
                 </a:tc>
@@ -21478,9 +21469,9 @@
                     <a:p>
                       <a:pPr algn="ctr"/>
                       <a:r>
-                        <a:rPr lang="ko-KR" sz="1100" b="0">
-                          <a:solidFill>
-                            <a:srgbClr val="333333"/>
+                        <a:rPr lang="ko-KR" sz="1100" b="1">
+                          <a:solidFill>
+                            <a:srgbClr val="FFFFFF"/>
                           </a:solidFill>
                         </a:rPr>
                         <a:t>43</a:t>
@@ -21509,7 +21500,7 @@
                       </a:solidFill>
                     </a:lnB>
                     <a:solidFill>
-                      <a:srgbClr val="FFFFFF"/>
+                      <a:srgbClr val="C00000"/>
                     </a:solidFill>
                   </a:tcPr>
                 </a:tc>
@@ -21764,7 +21755,7 @@
                   <a:srgbClr val="1F3864"/>
                 </a:solidFill>
               </a:rPr>
-              <a:t>18 24 30 33 34 35</a:t>
+              <a:t>03 15 18 30 42 43</a:t>
             </a:r>
           </a:p>
         </p:txBody>
@@ -21795,7 +21786,7 @@
                   <a:srgbClr val="808080"/>
                 </a:solidFill>
               </a:rPr>
-              <a:t>합 174 · 홀2:짝4</a:t>
+              <a:t>합 151 · 홀3:짝3</a:t>
             </a:r>
           </a:p>
         </p:txBody>
@@ -22454,9 +22445,9 @@
                     <a:p>
                       <a:pPr algn="ctr"/>
                       <a:r>
-                        <a:rPr lang="ko-KR" sz="1100" b="1">
-                          <a:solidFill>
-                            <a:srgbClr val="FFFFFF"/>
+                        <a:rPr lang="ko-KR" sz="1100" b="0">
+                          <a:solidFill>
+                            <a:srgbClr val="333333"/>
                           </a:solidFill>
                         </a:rPr>
                         <a:t>15</a:t>
@@ -22485,7 +22476,7 @@
                       </a:solidFill>
                     </a:lnB>
                     <a:solidFill>
-                      <a:srgbClr val="C00000"/>
+                      <a:srgbClr val="FFFFFF"/>
                     </a:solidFill>
                   </a:tcPr>
                 </a:tc>
@@ -22706,9 +22697,9 @@
                     <a:p>
                       <a:pPr algn="ctr"/>
                       <a:r>
-                        <a:rPr lang="ko-KR" sz="1100" b="1">
-                          <a:solidFill>
-                            <a:srgbClr val="FFFFFF"/>
+                        <a:rPr lang="ko-KR" sz="1100" b="0">
+                          <a:solidFill>
+                            <a:srgbClr val="333333"/>
                           </a:solidFill>
                         </a:rPr>
                         <a:t>21</a:t>
@@ -22737,7 +22728,7 @@
                       </a:solidFill>
                     </a:lnB>
                     <a:solidFill>
-                      <a:srgbClr val="C00000"/>
+                      <a:srgbClr val="FFFFFF"/>
                     </a:solidFill>
                   </a:tcPr>
                 </a:tc>
@@ -22792,9 +22783,9 @@
                     <a:p>
                       <a:pPr algn="ctr"/>
                       <a:r>
-                        <a:rPr lang="ko-KR" sz="1100" b="0">
-                          <a:solidFill>
-                            <a:srgbClr val="333333"/>
+                        <a:rPr lang="ko-KR" sz="1100" b="1">
+                          <a:solidFill>
+                            <a:srgbClr val="FFFFFF"/>
                           </a:solidFill>
                         </a:rPr>
                         <a:t>23</a:t>
@@ -22823,7 +22814,7 @@
                       </a:solidFill>
                     </a:lnB>
                     <a:solidFill>
-                      <a:srgbClr val="FFFFFF"/>
+                      <a:srgbClr val="C00000"/>
                     </a:solidFill>
                   </a:tcPr>
                 </a:tc>
@@ -23088,12 +23079,54 @@
                     <a:p>
                       <a:pPr algn="ctr"/>
                       <a:r>
+                        <a:rPr lang="ko-KR" sz="1100" b="1">
+                          <a:solidFill>
+                            <a:srgbClr val="FFFFFF"/>
+                          </a:solidFill>
+                        </a:rPr>
+                        <a:t>30</a:t>
+                      </a:r>
+                    </a:p>
+                  </a:txBody>
+                  <a:tcPr anchor="ctr" marL="0" marR="0" marT="0" marB="0">
+                    <a:lnL w="6350">
+                      <a:solidFill>
+                        <a:srgbClr val="BBBBBB"/>
+                      </a:solidFill>
+                    </a:lnL>
+                    <a:lnR w="6350">
+                      <a:solidFill>
+                        <a:srgbClr val="BBBBBB"/>
+                      </a:solidFill>
+                    </a:lnR>
+                    <a:lnT w="6350">
+                      <a:solidFill>
+                        <a:srgbClr val="BBBBBB"/>
+                      </a:solidFill>
+                    </a:lnT>
+                    <a:lnB w="6350">
+                      <a:solidFill>
+                        <a:srgbClr val="BBBBBB"/>
+                      </a:solidFill>
+                    </a:lnB>
+                    <a:solidFill>
+                      <a:srgbClr val="C00000"/>
+                    </a:solidFill>
+                  </a:tcPr>
+                </a:tc>
+                <a:tc>
+                  <a:txBody>
+                    <a:bodyPr lIns="9525" rIns="9525" tIns="6350" bIns="6350" anchor="ctr"/>
+                    <a:lstStyle/>
+                    <a:p>
+                      <a:pPr algn="ctr"/>
+                      <a:r>
                         <a:rPr lang="ko-KR" sz="1100" b="0">
                           <a:solidFill>
                             <a:srgbClr val="333333"/>
                           </a:solidFill>
                         </a:rPr>
-                        <a:t>30</a:t>
+                        <a:t>31</a:t>
                       </a:r>
                     </a:p>
                   </a:txBody>
@@ -23135,7 +23168,7 @@
                             <a:srgbClr val="333333"/>
                           </a:solidFill>
                         </a:rPr>
-                        <a:t>31</a:t>
+                        <a:t>32</a:t>
                       </a:r>
                     </a:p>
                   </a:txBody>
@@ -23177,7 +23210,7 @@
                             <a:srgbClr val="333333"/>
                           </a:solidFill>
                         </a:rPr>
-                        <a:t>32</a:t>
+                        <a:t>33</a:t>
                       </a:r>
                     </a:p>
                   </a:txBody>
@@ -23214,12 +23247,54 @@
                     <a:p>
                       <a:pPr algn="ctr"/>
                       <a:r>
+                        <a:rPr lang="ko-KR" sz="1100" b="0">
+                          <a:solidFill>
+                            <a:srgbClr val="333333"/>
+                          </a:solidFill>
+                        </a:rPr>
+                        <a:t>34</a:t>
+                      </a:r>
+                    </a:p>
+                  </a:txBody>
+                  <a:tcPr anchor="ctr" marL="0" marR="0" marT="0" marB="0">
+                    <a:lnL w="6350">
+                      <a:solidFill>
+                        <a:srgbClr val="BBBBBB"/>
+                      </a:solidFill>
+                    </a:lnL>
+                    <a:lnR w="6350">
+                      <a:solidFill>
+                        <a:srgbClr val="BBBBBB"/>
+                      </a:solidFill>
+                    </a:lnR>
+                    <a:lnT w="6350">
+                      <a:solidFill>
+                        <a:srgbClr val="BBBBBB"/>
+                      </a:solidFill>
+                    </a:lnT>
+                    <a:lnB w="6350">
+                      <a:solidFill>
+                        <a:srgbClr val="BBBBBB"/>
+                      </a:solidFill>
+                    </a:lnB>
+                    <a:solidFill>
+                      <a:srgbClr val="FFFFFF"/>
+                    </a:solidFill>
+                  </a:tcPr>
+                </a:tc>
+                <a:tc>
+                  <a:txBody>
+                    <a:bodyPr lIns="9525" rIns="9525" tIns="6350" bIns="6350" anchor="ctr"/>
+                    <a:lstStyle/>
+                    <a:p>
+                      <a:pPr algn="ctr"/>
+                      <a:r>
                         <a:rPr lang="ko-KR" sz="1100" b="1">
                           <a:solidFill>
                             <a:srgbClr val="FFFFFF"/>
                           </a:solidFill>
                         </a:rPr>
-                        <a:t>33</a:t>
+                        <a:t>35</a:t>
                       </a:r>
                     </a:p>
                   </a:txBody>
@@ -23246,90 +23321,6 @@
                     </a:lnB>
                     <a:solidFill>
                       <a:srgbClr val="C00000"/>
-                    </a:solidFill>
-                  </a:tcPr>
-                </a:tc>
-                <a:tc>
-                  <a:txBody>
-                    <a:bodyPr lIns="9525" rIns="9525" tIns="6350" bIns="6350" anchor="ctr"/>
-                    <a:lstStyle/>
-                    <a:p>
-                      <a:pPr algn="ctr"/>
-                      <a:r>
-                        <a:rPr lang="ko-KR" sz="1100" b="1">
-                          <a:solidFill>
-                            <a:srgbClr val="FFFFFF"/>
-                          </a:solidFill>
-                        </a:rPr>
-                        <a:t>34</a:t>
-                      </a:r>
-                    </a:p>
-                  </a:txBody>
-                  <a:tcPr anchor="ctr" marL="0" marR="0" marT="0" marB="0">
-                    <a:lnL w="6350">
-                      <a:solidFill>
-                        <a:srgbClr val="BBBBBB"/>
-                      </a:solidFill>
-                    </a:lnL>
-                    <a:lnR w="6350">
-                      <a:solidFill>
-                        <a:srgbClr val="BBBBBB"/>
-                      </a:solidFill>
-                    </a:lnR>
-                    <a:lnT w="6350">
-                      <a:solidFill>
-                        <a:srgbClr val="BBBBBB"/>
-                      </a:solidFill>
-                    </a:lnT>
-                    <a:lnB w="6350">
-                      <a:solidFill>
-                        <a:srgbClr val="BBBBBB"/>
-                      </a:solidFill>
-                    </a:lnB>
-                    <a:solidFill>
-                      <a:srgbClr val="C00000"/>
-                    </a:solidFill>
-                  </a:tcPr>
-                </a:tc>
-                <a:tc>
-                  <a:txBody>
-                    <a:bodyPr lIns="9525" rIns="9525" tIns="6350" bIns="6350" anchor="ctr"/>
-                    <a:lstStyle/>
-                    <a:p>
-                      <a:pPr algn="ctr"/>
-                      <a:r>
-                        <a:rPr lang="ko-KR" sz="1100" b="0">
-                          <a:solidFill>
-                            <a:srgbClr val="333333"/>
-                          </a:solidFill>
-                        </a:rPr>
-                        <a:t>35</a:t>
-                      </a:r>
-                    </a:p>
-                  </a:txBody>
-                  <a:tcPr anchor="ctr" marL="0" marR="0" marT="0" marB="0">
-                    <a:lnL w="6350">
-                      <a:solidFill>
-                        <a:srgbClr val="BBBBBB"/>
-                      </a:solidFill>
-                    </a:lnL>
-                    <a:lnR w="6350">
-                      <a:solidFill>
-                        <a:srgbClr val="BBBBBB"/>
-                      </a:solidFill>
-                    </a:lnR>
-                    <a:lnT w="6350">
-                      <a:solidFill>
-                        <a:srgbClr val="BBBBBB"/>
-                      </a:solidFill>
-                    </a:lnT>
-                    <a:lnB w="6350">
-                      <a:solidFill>
-                        <a:srgbClr val="BBBBBB"/>
-                      </a:solidFill>
-                    </a:lnB>
-                    <a:solidFill>
-                      <a:srgbClr val="FFFFFF"/>
                     </a:solidFill>
                   </a:tcPr>
                 </a:tc>
@@ -23342,12 +23333,54 @@
                     <a:p>
                       <a:pPr algn="ctr"/>
                       <a:r>
+                        <a:rPr lang="ko-KR" sz="1100" b="1">
+                          <a:solidFill>
+                            <a:srgbClr val="FFFFFF"/>
+                          </a:solidFill>
+                        </a:rPr>
+                        <a:t>36</a:t>
+                      </a:r>
+                    </a:p>
+                  </a:txBody>
+                  <a:tcPr anchor="ctr" marL="0" marR="0" marT="0" marB="0">
+                    <a:lnL w="6350">
+                      <a:solidFill>
+                        <a:srgbClr val="BBBBBB"/>
+                      </a:solidFill>
+                    </a:lnL>
+                    <a:lnR w="6350">
+                      <a:solidFill>
+                        <a:srgbClr val="BBBBBB"/>
+                      </a:solidFill>
+                    </a:lnR>
+                    <a:lnT w="6350">
+                      <a:solidFill>
+                        <a:srgbClr val="BBBBBB"/>
+                      </a:solidFill>
+                    </a:lnT>
+                    <a:lnB w="6350">
+                      <a:solidFill>
+                        <a:srgbClr val="BBBBBB"/>
+                      </a:solidFill>
+                    </a:lnB>
+                    <a:solidFill>
+                      <a:srgbClr val="C00000"/>
+                    </a:solidFill>
+                  </a:tcPr>
+                </a:tc>
+                <a:tc>
+                  <a:txBody>
+                    <a:bodyPr lIns="9525" rIns="9525" tIns="6350" bIns="6350" anchor="ctr"/>
+                    <a:lstStyle/>
+                    <a:p>
+                      <a:pPr algn="ctr"/>
+                      <a:r>
                         <a:rPr lang="ko-KR" sz="1100" b="0">
                           <a:solidFill>
                             <a:srgbClr val="333333"/>
                           </a:solidFill>
                         </a:rPr>
-                        <a:t>36</a:t>
+                        <a:t>37</a:t>
                       </a:r>
                     </a:p>
                   </a:txBody>
@@ -23389,7 +23422,7 @@
                             <a:srgbClr val="333333"/>
                           </a:solidFill>
                         </a:rPr>
-                        <a:t>37</a:t>
+                        <a:t>38</a:t>
                       </a:r>
                     </a:p>
                   </a:txBody>
@@ -23431,7 +23464,7 @@
                             <a:srgbClr val="333333"/>
                           </a:solidFill>
                         </a:rPr>
-                        <a:t>38</a:t>
+                        <a:t>39</a:t>
                       </a:r>
                     </a:p>
                   </a:txBody>
@@ -23468,12 +23501,96 @@
                     <a:p>
                       <a:pPr algn="ctr"/>
                       <a:r>
+                        <a:rPr lang="ko-KR" sz="1100" b="0">
+                          <a:solidFill>
+                            <a:srgbClr val="333333"/>
+                          </a:solidFill>
+                        </a:rPr>
+                        <a:t>40</a:t>
+                      </a:r>
+                    </a:p>
+                  </a:txBody>
+                  <a:tcPr anchor="ctr" marL="0" marR="0" marT="0" marB="0">
+                    <a:lnL w="6350">
+                      <a:solidFill>
+                        <a:srgbClr val="BBBBBB"/>
+                      </a:solidFill>
+                    </a:lnL>
+                    <a:lnR w="6350">
+                      <a:solidFill>
+                        <a:srgbClr val="BBBBBB"/>
+                      </a:solidFill>
+                    </a:lnR>
+                    <a:lnT w="6350">
+                      <a:solidFill>
+                        <a:srgbClr val="BBBBBB"/>
+                      </a:solidFill>
+                    </a:lnT>
+                    <a:lnB w="6350">
+                      <a:solidFill>
+                        <a:srgbClr val="BBBBBB"/>
+                      </a:solidFill>
+                    </a:lnB>
+                    <a:solidFill>
+                      <a:srgbClr val="FFFFFF"/>
+                    </a:solidFill>
+                  </a:tcPr>
+                </a:tc>
+                <a:tc>
+                  <a:txBody>
+                    <a:bodyPr lIns="9525" rIns="9525" tIns="6350" bIns="6350" anchor="ctr"/>
+                    <a:lstStyle/>
+                    <a:p>
+                      <a:pPr algn="ctr"/>
+                      <a:r>
+                        <a:rPr lang="ko-KR" sz="1100" b="0">
+                          <a:solidFill>
+                            <a:srgbClr val="333333"/>
+                          </a:solidFill>
+                        </a:rPr>
+                        <a:t>41</a:t>
+                      </a:r>
+                    </a:p>
+                  </a:txBody>
+                  <a:tcPr anchor="ctr" marL="0" marR="0" marT="0" marB="0">
+                    <a:lnL w="6350">
+                      <a:solidFill>
+                        <a:srgbClr val="BBBBBB"/>
+                      </a:solidFill>
+                    </a:lnL>
+                    <a:lnR w="6350">
+                      <a:solidFill>
+                        <a:srgbClr val="BBBBBB"/>
+                      </a:solidFill>
+                    </a:lnR>
+                    <a:lnT w="6350">
+                      <a:solidFill>
+                        <a:srgbClr val="BBBBBB"/>
+                      </a:solidFill>
+                    </a:lnT>
+                    <a:lnB w="6350">
+                      <a:solidFill>
+                        <a:srgbClr val="BBBBBB"/>
+                      </a:solidFill>
+                    </a:lnB>
+                    <a:solidFill>
+                      <a:srgbClr val="FFFFFF"/>
+                    </a:solidFill>
+                  </a:tcPr>
+                </a:tc>
+                <a:tc>
+                  <a:txBody>
+                    <a:bodyPr lIns="9525" rIns="9525" tIns="6350" bIns="6350" anchor="ctr"/>
+                    <a:lstStyle/>
+                    <a:p>
+                      <a:pPr algn="ctr"/>
+                      <a:r>
                         <a:rPr lang="ko-KR" sz="1100" b="1">
                           <a:solidFill>
                             <a:srgbClr val="FFFFFF"/>
                           </a:solidFill>
                         </a:rPr>
-                        <a:t>39</a:t>
+                        <a:t>42</a:t>
                       </a:r>
                     </a:p>
                   </a:txBody>
@@ -23500,132 +23617,6 @@
                     </a:lnB>
                     <a:solidFill>
                       <a:srgbClr val="C00000"/>
-                    </a:solidFill>
-                  </a:tcPr>
-                </a:tc>
-                <a:tc>
-                  <a:txBody>
-                    <a:bodyPr lIns="9525" rIns="9525" tIns="6350" bIns="6350" anchor="ctr"/>
-                    <a:lstStyle/>
-                    <a:p>
-                      <a:pPr algn="ctr"/>
-                      <a:r>
-                        <a:rPr lang="ko-KR" sz="1100" b="0">
-                          <a:solidFill>
-                            <a:srgbClr val="333333"/>
-                          </a:solidFill>
-                        </a:rPr>
-                        <a:t>40</a:t>
-                      </a:r>
-                    </a:p>
-                  </a:txBody>
-                  <a:tcPr anchor="ctr" marL="0" marR="0" marT="0" marB="0">
-                    <a:lnL w="6350">
-                      <a:solidFill>
-                        <a:srgbClr val="BBBBBB"/>
-                      </a:solidFill>
-                    </a:lnL>
-                    <a:lnR w="6350">
-                      <a:solidFill>
-                        <a:srgbClr val="BBBBBB"/>
-                      </a:solidFill>
-                    </a:lnR>
-                    <a:lnT w="6350">
-                      <a:solidFill>
-                        <a:srgbClr val="BBBBBB"/>
-                      </a:solidFill>
-                    </a:lnT>
-                    <a:lnB w="6350">
-                      <a:solidFill>
-                        <a:srgbClr val="BBBBBB"/>
-                      </a:solidFill>
-                    </a:lnB>
-                    <a:solidFill>
-                      <a:srgbClr val="FFFFFF"/>
-                    </a:solidFill>
-                  </a:tcPr>
-                </a:tc>
-                <a:tc>
-                  <a:txBody>
-                    <a:bodyPr lIns="9525" rIns="9525" tIns="6350" bIns="6350" anchor="ctr"/>
-                    <a:lstStyle/>
-                    <a:p>
-                      <a:pPr algn="ctr"/>
-                      <a:r>
-                        <a:rPr lang="ko-KR" sz="1100" b="0">
-                          <a:solidFill>
-                            <a:srgbClr val="333333"/>
-                          </a:solidFill>
-                        </a:rPr>
-                        <a:t>41</a:t>
-                      </a:r>
-                    </a:p>
-                  </a:txBody>
-                  <a:tcPr anchor="ctr" marL="0" marR="0" marT="0" marB="0">
-                    <a:lnL w="6350">
-                      <a:solidFill>
-                        <a:srgbClr val="BBBBBB"/>
-                      </a:solidFill>
-                    </a:lnL>
-                    <a:lnR w="6350">
-                      <a:solidFill>
-                        <a:srgbClr val="BBBBBB"/>
-                      </a:solidFill>
-                    </a:lnR>
-                    <a:lnT w="6350">
-                      <a:solidFill>
-                        <a:srgbClr val="BBBBBB"/>
-                      </a:solidFill>
-                    </a:lnT>
-                    <a:lnB w="6350">
-                      <a:solidFill>
-                        <a:srgbClr val="BBBBBB"/>
-                      </a:solidFill>
-                    </a:lnB>
-                    <a:solidFill>
-                      <a:srgbClr val="FFFFFF"/>
-                    </a:solidFill>
-                  </a:tcPr>
-                </a:tc>
-                <a:tc>
-                  <a:txBody>
-                    <a:bodyPr lIns="9525" rIns="9525" tIns="6350" bIns="6350" anchor="ctr"/>
-                    <a:lstStyle/>
-                    <a:p>
-                      <a:pPr algn="ctr"/>
-                      <a:r>
-                        <a:rPr lang="ko-KR" sz="1100" b="0">
-                          <a:solidFill>
-                            <a:srgbClr val="333333"/>
-                          </a:solidFill>
-                        </a:rPr>
-                        <a:t>42</a:t>
-                      </a:r>
-                    </a:p>
-                  </a:txBody>
-                  <a:tcPr anchor="ctr" marL="0" marR="0" marT="0" marB="0">
-                    <a:lnL w="6350">
-                      <a:solidFill>
-                        <a:srgbClr val="BBBBBB"/>
-                      </a:solidFill>
-                    </a:lnL>
-                    <a:lnR w="6350">
-                      <a:solidFill>
-                        <a:srgbClr val="BBBBBB"/>
-                      </a:solidFill>
-                    </a:lnR>
-                    <a:lnT w="6350">
-                      <a:solidFill>
-                        <a:srgbClr val="BBBBBB"/>
-                      </a:solidFill>
-                    </a:lnT>
-                    <a:lnB w="6350">
-                      <a:solidFill>
-                        <a:srgbClr val="BBBBBB"/>
-                      </a:solidFill>
-                    </a:lnB>
-                    <a:solidFill>
-                      <a:srgbClr val="FFFFFF"/>
                     </a:solidFill>
                   </a:tcPr>
                 </a:tc>
@@ -23924,7 +23915,7 @@
                   <a:srgbClr val="1F3864"/>
                 </a:solidFill>
               </a:rPr>
-              <a:t>03 15 21 33 34 39</a:t>
+              <a:t>03 23 30 35 36 42</a:t>
             </a:r>
           </a:p>
         </p:txBody>
@@ -23955,7 +23946,7 @@
                   <a:srgbClr val="808080"/>
                 </a:solidFill>
               </a:rPr>
-              <a:t>합 145 · 홀5:짝1</a:t>
+              <a:t>합 169 · 홀3:짝3</a:t>
             </a:r>
           </a:p>
         </p:txBody>
@@ -24614,12 +24605,264 @@
                     <a:p>
                       <a:pPr algn="ctr"/>
                       <a:r>
+                        <a:rPr lang="ko-KR" sz="1100" b="0">
+                          <a:solidFill>
+                            <a:srgbClr val="333333"/>
+                          </a:solidFill>
+                        </a:rPr>
+                        <a:t>15</a:t>
+                      </a:r>
+                    </a:p>
+                  </a:txBody>
+                  <a:tcPr anchor="ctr" marL="0" marR="0" marT="0" marB="0">
+                    <a:lnL w="6350">
+                      <a:solidFill>
+                        <a:srgbClr val="BBBBBB"/>
+                      </a:solidFill>
+                    </a:lnL>
+                    <a:lnR w="6350">
+                      <a:solidFill>
+                        <a:srgbClr val="BBBBBB"/>
+                      </a:solidFill>
+                    </a:lnR>
+                    <a:lnT w="6350">
+                      <a:solidFill>
+                        <a:srgbClr val="BBBBBB"/>
+                      </a:solidFill>
+                    </a:lnT>
+                    <a:lnB w="6350">
+                      <a:solidFill>
+                        <a:srgbClr val="BBBBBB"/>
+                      </a:solidFill>
+                    </a:lnB>
+                    <a:solidFill>
+                      <a:srgbClr val="FFFFFF"/>
+                    </a:solidFill>
+                  </a:tcPr>
+                </a:tc>
+                <a:tc>
+                  <a:txBody>
+                    <a:bodyPr lIns="9525" rIns="9525" tIns="6350" bIns="6350" anchor="ctr"/>
+                    <a:lstStyle/>
+                    <a:p>
+                      <a:pPr algn="ctr"/>
+                      <a:r>
+                        <a:rPr lang="ko-KR" sz="1100" b="0">
+                          <a:solidFill>
+                            <a:srgbClr val="333333"/>
+                          </a:solidFill>
+                        </a:rPr>
+                        <a:t>16</a:t>
+                      </a:r>
+                    </a:p>
+                  </a:txBody>
+                  <a:tcPr anchor="ctr" marL="0" marR="0" marT="0" marB="0">
+                    <a:lnL w="6350">
+                      <a:solidFill>
+                        <a:srgbClr val="BBBBBB"/>
+                      </a:solidFill>
+                    </a:lnL>
+                    <a:lnR w="6350">
+                      <a:solidFill>
+                        <a:srgbClr val="BBBBBB"/>
+                      </a:solidFill>
+                    </a:lnR>
+                    <a:lnT w="6350">
+                      <a:solidFill>
+                        <a:srgbClr val="BBBBBB"/>
+                      </a:solidFill>
+                    </a:lnT>
+                    <a:lnB w="6350">
+                      <a:solidFill>
+                        <a:srgbClr val="BBBBBB"/>
+                      </a:solidFill>
+                    </a:lnB>
+                    <a:solidFill>
+                      <a:srgbClr val="FFFFFF"/>
+                    </a:solidFill>
+                  </a:tcPr>
+                </a:tc>
+                <a:tc>
+                  <a:txBody>
+                    <a:bodyPr lIns="9525" rIns="9525" tIns="6350" bIns="6350" anchor="ctr"/>
+                    <a:lstStyle/>
+                    <a:p>
+                      <a:pPr algn="ctr"/>
+                      <a:r>
+                        <a:rPr lang="ko-KR" sz="1100" b="0">
+                          <a:solidFill>
+                            <a:srgbClr val="333333"/>
+                          </a:solidFill>
+                        </a:rPr>
+                        <a:t>17</a:t>
+                      </a:r>
+                    </a:p>
+                  </a:txBody>
+                  <a:tcPr anchor="ctr" marL="0" marR="0" marT="0" marB="0">
+                    <a:lnL w="6350">
+                      <a:solidFill>
+                        <a:srgbClr val="BBBBBB"/>
+                      </a:solidFill>
+                    </a:lnL>
+                    <a:lnR w="6350">
+                      <a:solidFill>
+                        <a:srgbClr val="BBBBBB"/>
+                      </a:solidFill>
+                    </a:lnR>
+                    <a:lnT w="6350">
+                      <a:solidFill>
+                        <a:srgbClr val="BBBBBB"/>
+                      </a:solidFill>
+                    </a:lnT>
+                    <a:lnB w="6350">
+                      <a:solidFill>
+                        <a:srgbClr val="BBBBBB"/>
+                      </a:solidFill>
+                    </a:lnB>
+                    <a:solidFill>
+                      <a:srgbClr val="FFFFFF"/>
+                    </a:solidFill>
+                  </a:tcPr>
+                </a:tc>
+                <a:tc>
+                  <a:txBody>
+                    <a:bodyPr lIns="9525" rIns="9525" tIns="6350" bIns="6350" anchor="ctr"/>
+                    <a:lstStyle/>
+                    <a:p>
+                      <a:pPr algn="ctr"/>
+                      <a:r>
+                        <a:rPr lang="ko-KR" sz="1100" b="0">
+                          <a:solidFill>
+                            <a:srgbClr val="333333"/>
+                          </a:solidFill>
+                        </a:rPr>
+                        <a:t>18</a:t>
+                      </a:r>
+                    </a:p>
+                  </a:txBody>
+                  <a:tcPr anchor="ctr" marL="0" marR="0" marT="0" marB="0">
+                    <a:lnL w="6350">
+                      <a:solidFill>
+                        <a:srgbClr val="BBBBBB"/>
+                      </a:solidFill>
+                    </a:lnL>
+                    <a:lnR w="6350">
+                      <a:solidFill>
+                        <a:srgbClr val="BBBBBB"/>
+                      </a:solidFill>
+                    </a:lnR>
+                    <a:lnT w="6350">
+                      <a:solidFill>
+                        <a:srgbClr val="BBBBBB"/>
+                      </a:solidFill>
+                    </a:lnT>
+                    <a:lnB w="6350">
+                      <a:solidFill>
+                        <a:srgbClr val="BBBBBB"/>
+                      </a:solidFill>
+                    </a:lnB>
+                    <a:solidFill>
+                      <a:srgbClr val="FFFFFF"/>
+                    </a:solidFill>
+                  </a:tcPr>
+                </a:tc>
+                <a:tc>
+                  <a:txBody>
+                    <a:bodyPr lIns="9525" rIns="9525" tIns="6350" bIns="6350" anchor="ctr"/>
+                    <a:lstStyle/>
+                    <a:p>
+                      <a:pPr algn="ctr"/>
+                      <a:r>
+                        <a:rPr lang="ko-KR" sz="1100" b="0">
+                          <a:solidFill>
+                            <a:srgbClr val="333333"/>
+                          </a:solidFill>
+                        </a:rPr>
+                        <a:t>19</a:t>
+                      </a:r>
+                    </a:p>
+                  </a:txBody>
+                  <a:tcPr anchor="ctr" marL="0" marR="0" marT="0" marB="0">
+                    <a:lnL w="6350">
+                      <a:solidFill>
+                        <a:srgbClr val="BBBBBB"/>
+                      </a:solidFill>
+                    </a:lnL>
+                    <a:lnR w="6350">
+                      <a:solidFill>
+                        <a:srgbClr val="BBBBBB"/>
+                      </a:solidFill>
+                    </a:lnR>
+                    <a:lnT w="6350">
+                      <a:solidFill>
+                        <a:srgbClr val="BBBBBB"/>
+                      </a:solidFill>
+                    </a:lnT>
+                    <a:lnB w="6350">
+                      <a:solidFill>
+                        <a:srgbClr val="BBBBBB"/>
+                      </a:solidFill>
+                    </a:lnB>
+                    <a:solidFill>
+                      <a:srgbClr val="FFFFFF"/>
+                    </a:solidFill>
+                  </a:tcPr>
+                </a:tc>
+                <a:tc>
+                  <a:txBody>
+                    <a:bodyPr lIns="9525" rIns="9525" tIns="6350" bIns="6350" anchor="ctr"/>
+                    <a:lstStyle/>
+                    <a:p>
+                      <a:pPr algn="ctr"/>
+                      <a:r>
+                        <a:rPr lang="ko-KR" sz="1100" b="0">
+                          <a:solidFill>
+                            <a:srgbClr val="333333"/>
+                          </a:solidFill>
+                        </a:rPr>
+                        <a:t>20</a:t>
+                      </a:r>
+                    </a:p>
+                  </a:txBody>
+                  <a:tcPr anchor="ctr" marL="0" marR="0" marT="0" marB="0">
+                    <a:lnL w="6350">
+                      <a:solidFill>
+                        <a:srgbClr val="BBBBBB"/>
+                      </a:solidFill>
+                    </a:lnL>
+                    <a:lnR w="6350">
+                      <a:solidFill>
+                        <a:srgbClr val="BBBBBB"/>
+                      </a:solidFill>
+                    </a:lnR>
+                    <a:lnT w="6350">
+                      <a:solidFill>
+                        <a:srgbClr val="BBBBBB"/>
+                      </a:solidFill>
+                    </a:lnT>
+                    <a:lnB w="6350">
+                      <a:solidFill>
+                        <a:srgbClr val="BBBBBB"/>
+                      </a:solidFill>
+                    </a:lnB>
+                    <a:solidFill>
+                      <a:srgbClr val="FFFFFF"/>
+                    </a:solidFill>
+                  </a:tcPr>
+                </a:tc>
+                <a:tc>
+                  <a:txBody>
+                    <a:bodyPr lIns="9525" rIns="9525" tIns="6350" bIns="6350" anchor="ctr"/>
+                    <a:lstStyle/>
+                    <a:p>
+                      <a:pPr algn="ctr"/>
+                      <a:r>
                         <a:rPr lang="ko-KR" sz="1100" b="1">
                           <a:solidFill>
                             <a:srgbClr val="FFFFFF"/>
                           </a:solidFill>
                         </a:rPr>
-                        <a:t>15</a:t>
+                        <a:t>21</a:t>
                       </a:r>
                     </a:p>
                   </a:txBody>
@@ -24646,258 +24889,6 @@
                     </a:lnB>
                     <a:solidFill>
                       <a:srgbClr val="C00000"/>
-                    </a:solidFill>
-                  </a:tcPr>
-                </a:tc>
-                <a:tc>
-                  <a:txBody>
-                    <a:bodyPr lIns="9525" rIns="9525" tIns="6350" bIns="6350" anchor="ctr"/>
-                    <a:lstStyle/>
-                    <a:p>
-                      <a:pPr algn="ctr"/>
-                      <a:r>
-                        <a:rPr lang="ko-KR" sz="1100" b="0">
-                          <a:solidFill>
-                            <a:srgbClr val="333333"/>
-                          </a:solidFill>
-                        </a:rPr>
-                        <a:t>16</a:t>
-                      </a:r>
-                    </a:p>
-                  </a:txBody>
-                  <a:tcPr anchor="ctr" marL="0" marR="0" marT="0" marB="0">
-                    <a:lnL w="6350">
-                      <a:solidFill>
-                        <a:srgbClr val="BBBBBB"/>
-                      </a:solidFill>
-                    </a:lnL>
-                    <a:lnR w="6350">
-                      <a:solidFill>
-                        <a:srgbClr val="BBBBBB"/>
-                      </a:solidFill>
-                    </a:lnR>
-                    <a:lnT w="6350">
-                      <a:solidFill>
-                        <a:srgbClr val="BBBBBB"/>
-                      </a:solidFill>
-                    </a:lnT>
-                    <a:lnB w="6350">
-                      <a:solidFill>
-                        <a:srgbClr val="BBBBBB"/>
-                      </a:solidFill>
-                    </a:lnB>
-                    <a:solidFill>
-                      <a:srgbClr val="FFFFFF"/>
-                    </a:solidFill>
-                  </a:tcPr>
-                </a:tc>
-                <a:tc>
-                  <a:txBody>
-                    <a:bodyPr lIns="9525" rIns="9525" tIns="6350" bIns="6350" anchor="ctr"/>
-                    <a:lstStyle/>
-                    <a:p>
-                      <a:pPr algn="ctr"/>
-                      <a:r>
-                        <a:rPr lang="ko-KR" sz="1100" b="0">
-                          <a:solidFill>
-                            <a:srgbClr val="333333"/>
-                          </a:solidFill>
-                        </a:rPr>
-                        <a:t>17</a:t>
-                      </a:r>
-                    </a:p>
-                  </a:txBody>
-                  <a:tcPr anchor="ctr" marL="0" marR="0" marT="0" marB="0">
-                    <a:lnL w="6350">
-                      <a:solidFill>
-                        <a:srgbClr val="BBBBBB"/>
-                      </a:solidFill>
-                    </a:lnL>
-                    <a:lnR w="6350">
-                      <a:solidFill>
-                        <a:srgbClr val="BBBBBB"/>
-                      </a:solidFill>
-                    </a:lnR>
-                    <a:lnT w="6350">
-                      <a:solidFill>
-                        <a:srgbClr val="BBBBBB"/>
-                      </a:solidFill>
-                    </a:lnT>
-                    <a:lnB w="6350">
-                      <a:solidFill>
-                        <a:srgbClr val="BBBBBB"/>
-                      </a:solidFill>
-                    </a:lnB>
-                    <a:solidFill>
-                      <a:srgbClr val="FFFFFF"/>
-                    </a:solidFill>
-                  </a:tcPr>
-                </a:tc>
-                <a:tc>
-                  <a:txBody>
-                    <a:bodyPr lIns="9525" rIns="9525" tIns="6350" bIns="6350" anchor="ctr"/>
-                    <a:lstStyle/>
-                    <a:p>
-                      <a:pPr algn="ctr"/>
-                      <a:r>
-                        <a:rPr lang="ko-KR" sz="1100" b="0">
-                          <a:solidFill>
-                            <a:srgbClr val="333333"/>
-                          </a:solidFill>
-                        </a:rPr>
-                        <a:t>18</a:t>
-                      </a:r>
-                    </a:p>
-                  </a:txBody>
-                  <a:tcPr anchor="ctr" marL="0" marR="0" marT="0" marB="0">
-                    <a:lnL w="6350">
-                      <a:solidFill>
-                        <a:srgbClr val="BBBBBB"/>
-                      </a:solidFill>
-                    </a:lnL>
-                    <a:lnR w="6350">
-                      <a:solidFill>
-                        <a:srgbClr val="BBBBBB"/>
-                      </a:solidFill>
-                    </a:lnR>
-                    <a:lnT w="6350">
-                      <a:solidFill>
-                        <a:srgbClr val="BBBBBB"/>
-                      </a:solidFill>
-                    </a:lnT>
-                    <a:lnB w="6350">
-                      <a:solidFill>
-                        <a:srgbClr val="BBBBBB"/>
-                      </a:solidFill>
-                    </a:lnB>
-                    <a:solidFill>
-                      <a:srgbClr val="FFFFFF"/>
-                    </a:solidFill>
-                  </a:tcPr>
-                </a:tc>
-                <a:tc>
-                  <a:txBody>
-                    <a:bodyPr lIns="9525" rIns="9525" tIns="6350" bIns="6350" anchor="ctr"/>
-                    <a:lstStyle/>
-                    <a:p>
-                      <a:pPr algn="ctr"/>
-                      <a:r>
-                        <a:rPr lang="ko-KR" sz="1100" b="0">
-                          <a:solidFill>
-                            <a:srgbClr val="333333"/>
-                          </a:solidFill>
-                        </a:rPr>
-                        <a:t>19</a:t>
-                      </a:r>
-                    </a:p>
-                  </a:txBody>
-                  <a:tcPr anchor="ctr" marL="0" marR="0" marT="0" marB="0">
-                    <a:lnL w="6350">
-                      <a:solidFill>
-                        <a:srgbClr val="BBBBBB"/>
-                      </a:solidFill>
-                    </a:lnL>
-                    <a:lnR w="6350">
-                      <a:solidFill>
-                        <a:srgbClr val="BBBBBB"/>
-                      </a:solidFill>
-                    </a:lnR>
-                    <a:lnT w="6350">
-                      <a:solidFill>
-                        <a:srgbClr val="BBBBBB"/>
-                      </a:solidFill>
-                    </a:lnT>
-                    <a:lnB w="6350">
-                      <a:solidFill>
-                        <a:srgbClr val="BBBBBB"/>
-                      </a:solidFill>
-                    </a:lnB>
-                    <a:solidFill>
-                      <a:srgbClr val="FFFFFF"/>
-                    </a:solidFill>
-                  </a:tcPr>
-                </a:tc>
-                <a:tc>
-                  <a:txBody>
-                    <a:bodyPr lIns="9525" rIns="9525" tIns="6350" bIns="6350" anchor="ctr"/>
-                    <a:lstStyle/>
-                    <a:p>
-                      <a:pPr algn="ctr"/>
-                      <a:r>
-                        <a:rPr lang="ko-KR" sz="1100" b="0">
-                          <a:solidFill>
-                            <a:srgbClr val="333333"/>
-                          </a:solidFill>
-                        </a:rPr>
-                        <a:t>20</a:t>
-                      </a:r>
-                    </a:p>
-                  </a:txBody>
-                  <a:tcPr anchor="ctr" marL="0" marR="0" marT="0" marB="0">
-                    <a:lnL w="6350">
-                      <a:solidFill>
-                        <a:srgbClr val="BBBBBB"/>
-                      </a:solidFill>
-                    </a:lnL>
-                    <a:lnR w="6350">
-                      <a:solidFill>
-                        <a:srgbClr val="BBBBBB"/>
-                      </a:solidFill>
-                    </a:lnR>
-                    <a:lnT w="6350">
-                      <a:solidFill>
-                        <a:srgbClr val="BBBBBB"/>
-                      </a:solidFill>
-                    </a:lnT>
-                    <a:lnB w="6350">
-                      <a:solidFill>
-                        <a:srgbClr val="BBBBBB"/>
-                      </a:solidFill>
-                    </a:lnB>
-                    <a:solidFill>
-                      <a:srgbClr val="FFFFFF"/>
-                    </a:solidFill>
-                  </a:tcPr>
-                </a:tc>
-                <a:tc>
-                  <a:txBody>
-                    <a:bodyPr lIns="9525" rIns="9525" tIns="6350" bIns="6350" anchor="ctr"/>
-                    <a:lstStyle/>
-                    <a:p>
-                      <a:pPr algn="ctr"/>
-                      <a:r>
-                        <a:rPr lang="ko-KR" sz="1100" b="0">
-                          <a:solidFill>
-                            <a:srgbClr val="333333"/>
-                          </a:solidFill>
-                        </a:rPr>
-                        <a:t>21</a:t>
-                      </a:r>
-                    </a:p>
-                  </a:txBody>
-                  <a:tcPr anchor="ctr" marL="0" marR="0" marT="0" marB="0">
-                    <a:lnL w="6350">
-                      <a:solidFill>
-                        <a:srgbClr val="BBBBBB"/>
-                      </a:solidFill>
-                    </a:lnL>
-                    <a:lnR w="6350">
-                      <a:solidFill>
-                        <a:srgbClr val="BBBBBB"/>
-                      </a:solidFill>
-                    </a:lnR>
-                    <a:lnT w="6350">
-                      <a:solidFill>
-                        <a:srgbClr val="BBBBBB"/>
-                      </a:solidFill>
-                    </a:lnT>
-                    <a:lnB w="6350">
-                      <a:solidFill>
-                        <a:srgbClr val="BBBBBB"/>
-                      </a:solidFill>
-                    </a:lnB>
-                    <a:solidFill>
-                      <a:srgbClr val="FFFFFF"/>
                     </a:solidFill>
                   </a:tcPr>
                 </a:tc>
@@ -25036,9 +25027,9 @@
                     <a:p>
                       <a:pPr algn="ctr"/>
                       <a:r>
-                        <a:rPr lang="ko-KR" sz="1100" b="0">
-                          <a:solidFill>
-                            <a:srgbClr val="333333"/>
+                        <a:rPr lang="ko-KR" sz="1100" b="1">
+                          <a:solidFill>
+                            <a:srgbClr val="FFFFFF"/>
                           </a:solidFill>
                         </a:rPr>
                         <a:t>25</a:t>
@@ -25067,7 +25058,7 @@
                       </a:solidFill>
                     </a:lnB>
                     <a:solidFill>
-                      <a:srgbClr val="FFFFFF"/>
+                      <a:srgbClr val="C00000"/>
                     </a:solidFill>
                   </a:tcPr>
                 </a:tc>
@@ -25248,12 +25239,54 @@
                     <a:p>
                       <a:pPr algn="ctr"/>
                       <a:r>
+                        <a:rPr lang="ko-KR" sz="1100" b="1">
+                          <a:solidFill>
+                            <a:srgbClr val="FFFFFF"/>
+                          </a:solidFill>
+                        </a:rPr>
+                        <a:t>30</a:t>
+                      </a:r>
+                    </a:p>
+                  </a:txBody>
+                  <a:tcPr anchor="ctr" marL="0" marR="0" marT="0" marB="0">
+                    <a:lnL w="6350">
+                      <a:solidFill>
+                        <a:srgbClr val="BBBBBB"/>
+                      </a:solidFill>
+                    </a:lnL>
+                    <a:lnR w="6350">
+                      <a:solidFill>
+                        <a:srgbClr val="BBBBBB"/>
+                      </a:solidFill>
+                    </a:lnR>
+                    <a:lnT w="6350">
+                      <a:solidFill>
+                        <a:srgbClr val="BBBBBB"/>
+                      </a:solidFill>
+                    </a:lnT>
+                    <a:lnB w="6350">
+                      <a:solidFill>
+                        <a:srgbClr val="BBBBBB"/>
+                      </a:solidFill>
+                    </a:lnB>
+                    <a:solidFill>
+                      <a:srgbClr val="C00000"/>
+                    </a:solidFill>
+                  </a:tcPr>
+                </a:tc>
+                <a:tc>
+                  <a:txBody>
+                    <a:bodyPr lIns="9525" rIns="9525" tIns="6350" bIns="6350" anchor="ctr"/>
+                    <a:lstStyle/>
+                    <a:p>
+                      <a:pPr algn="ctr"/>
+                      <a:r>
                         <a:rPr lang="ko-KR" sz="1100" b="0">
                           <a:solidFill>
                             <a:srgbClr val="333333"/>
                           </a:solidFill>
                         </a:rPr>
-                        <a:t>30</a:t>
+                        <a:t>31</a:t>
                       </a:r>
                     </a:p>
                   </a:txBody>
@@ -25290,48 +25323,6 @@
                     <a:p>
                       <a:pPr algn="ctr"/>
                       <a:r>
-                        <a:rPr lang="ko-KR" sz="1100" b="1">
-                          <a:solidFill>
-                            <a:srgbClr val="FFFFFF"/>
-                          </a:solidFill>
-                        </a:rPr>
-                        <a:t>31</a:t>
-                      </a:r>
-                    </a:p>
-                  </a:txBody>
-                  <a:tcPr anchor="ctr" marL="0" marR="0" marT="0" marB="0">
-                    <a:lnL w="6350">
-                      <a:solidFill>
-                        <a:srgbClr val="BBBBBB"/>
-                      </a:solidFill>
-                    </a:lnL>
-                    <a:lnR w="6350">
-                      <a:solidFill>
-                        <a:srgbClr val="BBBBBB"/>
-                      </a:solidFill>
-                    </a:lnR>
-                    <a:lnT w="6350">
-                      <a:solidFill>
-                        <a:srgbClr val="BBBBBB"/>
-                      </a:solidFill>
-                    </a:lnT>
-                    <a:lnB w="6350">
-                      <a:solidFill>
-                        <a:srgbClr val="BBBBBB"/>
-                      </a:solidFill>
-                    </a:lnB>
-                    <a:solidFill>
-                      <a:srgbClr val="C00000"/>
-                    </a:solidFill>
-                  </a:tcPr>
-                </a:tc>
-                <a:tc>
-                  <a:txBody>
-                    <a:bodyPr lIns="9525" rIns="9525" tIns="6350" bIns="6350" anchor="ctr"/>
-                    <a:lstStyle/>
-                    <a:p>
-                      <a:pPr algn="ctr"/>
-                      <a:r>
                         <a:rPr lang="ko-KR" sz="1100" b="0">
                           <a:solidFill>
                             <a:srgbClr val="333333"/>
@@ -25416,9 +25407,9 @@
                     <a:p>
                       <a:pPr algn="ctr"/>
                       <a:r>
-                        <a:rPr lang="ko-KR" sz="1100" b="1">
-                          <a:solidFill>
-                            <a:srgbClr val="FFFFFF"/>
+                        <a:rPr lang="ko-KR" sz="1100" b="0">
+                          <a:solidFill>
+                            <a:srgbClr val="333333"/>
                           </a:solidFill>
                         </a:rPr>
                         <a:t>34</a:t>
@@ -25447,7 +25438,7 @@
                       </a:solidFill>
                     </a:lnB>
                     <a:solidFill>
-                      <a:srgbClr val="C00000"/>
+                      <a:srgbClr val="FFFFFF"/>
                     </a:solidFill>
                   </a:tcPr>
                 </a:tc>
@@ -25544,12 +25535,222 @@
                     <a:p>
                       <a:pPr algn="ctr"/>
                       <a:r>
+                        <a:rPr lang="ko-KR" sz="1100" b="0">
+                          <a:solidFill>
+                            <a:srgbClr val="333333"/>
+                          </a:solidFill>
+                        </a:rPr>
+                        <a:t>37</a:t>
+                      </a:r>
+                    </a:p>
+                  </a:txBody>
+                  <a:tcPr anchor="ctr" marL="0" marR="0" marT="0" marB="0">
+                    <a:lnL w="6350">
+                      <a:solidFill>
+                        <a:srgbClr val="BBBBBB"/>
+                      </a:solidFill>
+                    </a:lnL>
+                    <a:lnR w="6350">
+                      <a:solidFill>
+                        <a:srgbClr val="BBBBBB"/>
+                      </a:solidFill>
+                    </a:lnR>
+                    <a:lnT w="6350">
+                      <a:solidFill>
+                        <a:srgbClr val="BBBBBB"/>
+                      </a:solidFill>
+                    </a:lnT>
+                    <a:lnB w="6350">
+                      <a:solidFill>
+                        <a:srgbClr val="BBBBBB"/>
+                      </a:solidFill>
+                    </a:lnB>
+                    <a:solidFill>
+                      <a:srgbClr val="FFFFFF"/>
+                    </a:solidFill>
+                  </a:tcPr>
+                </a:tc>
+                <a:tc>
+                  <a:txBody>
+                    <a:bodyPr lIns="9525" rIns="9525" tIns="6350" bIns="6350" anchor="ctr"/>
+                    <a:lstStyle/>
+                    <a:p>
+                      <a:pPr algn="ctr"/>
+                      <a:r>
+                        <a:rPr lang="ko-KR" sz="1100" b="0">
+                          <a:solidFill>
+                            <a:srgbClr val="333333"/>
+                          </a:solidFill>
+                        </a:rPr>
+                        <a:t>38</a:t>
+                      </a:r>
+                    </a:p>
+                  </a:txBody>
+                  <a:tcPr anchor="ctr" marL="0" marR="0" marT="0" marB="0">
+                    <a:lnL w="6350">
+                      <a:solidFill>
+                        <a:srgbClr val="BBBBBB"/>
+                      </a:solidFill>
+                    </a:lnL>
+                    <a:lnR w="6350">
+                      <a:solidFill>
+                        <a:srgbClr val="BBBBBB"/>
+                      </a:solidFill>
+                    </a:lnR>
+                    <a:lnT w="6350">
+                      <a:solidFill>
+                        <a:srgbClr val="BBBBBB"/>
+                      </a:solidFill>
+                    </a:lnT>
+                    <a:lnB w="6350">
+                      <a:solidFill>
+                        <a:srgbClr val="BBBBBB"/>
+                      </a:solidFill>
+                    </a:lnB>
+                    <a:solidFill>
+                      <a:srgbClr val="FFFFFF"/>
+                    </a:solidFill>
+                  </a:tcPr>
+                </a:tc>
+                <a:tc>
+                  <a:txBody>
+                    <a:bodyPr lIns="9525" rIns="9525" tIns="6350" bIns="6350" anchor="ctr"/>
+                    <a:lstStyle/>
+                    <a:p>
+                      <a:pPr algn="ctr"/>
+                      <a:r>
+                        <a:rPr lang="ko-KR" sz="1100" b="0">
+                          <a:solidFill>
+                            <a:srgbClr val="333333"/>
+                          </a:solidFill>
+                        </a:rPr>
+                        <a:t>39</a:t>
+                      </a:r>
+                    </a:p>
+                  </a:txBody>
+                  <a:tcPr anchor="ctr" marL="0" marR="0" marT="0" marB="0">
+                    <a:lnL w="6350">
+                      <a:solidFill>
+                        <a:srgbClr val="BBBBBB"/>
+                      </a:solidFill>
+                    </a:lnL>
+                    <a:lnR w="6350">
+                      <a:solidFill>
+                        <a:srgbClr val="BBBBBB"/>
+                      </a:solidFill>
+                    </a:lnR>
+                    <a:lnT w="6350">
+                      <a:solidFill>
+                        <a:srgbClr val="BBBBBB"/>
+                      </a:solidFill>
+                    </a:lnT>
+                    <a:lnB w="6350">
+                      <a:solidFill>
+                        <a:srgbClr val="BBBBBB"/>
+                      </a:solidFill>
+                    </a:lnB>
+                    <a:solidFill>
+                      <a:srgbClr val="FFFFFF"/>
+                    </a:solidFill>
+                  </a:tcPr>
+                </a:tc>
+                <a:tc>
+                  <a:txBody>
+                    <a:bodyPr lIns="9525" rIns="9525" tIns="6350" bIns="6350" anchor="ctr"/>
+                    <a:lstStyle/>
+                    <a:p>
+                      <a:pPr algn="ctr"/>
+                      <a:r>
+                        <a:rPr lang="ko-KR" sz="1100" b="0">
+                          <a:solidFill>
+                            <a:srgbClr val="333333"/>
+                          </a:solidFill>
+                        </a:rPr>
+                        <a:t>40</a:t>
+                      </a:r>
+                    </a:p>
+                  </a:txBody>
+                  <a:tcPr anchor="ctr" marL="0" marR="0" marT="0" marB="0">
+                    <a:lnL w="6350">
+                      <a:solidFill>
+                        <a:srgbClr val="BBBBBB"/>
+                      </a:solidFill>
+                    </a:lnL>
+                    <a:lnR w="6350">
+                      <a:solidFill>
+                        <a:srgbClr val="BBBBBB"/>
+                      </a:solidFill>
+                    </a:lnR>
+                    <a:lnT w="6350">
+                      <a:solidFill>
+                        <a:srgbClr val="BBBBBB"/>
+                      </a:solidFill>
+                    </a:lnT>
+                    <a:lnB w="6350">
+                      <a:solidFill>
+                        <a:srgbClr val="BBBBBB"/>
+                      </a:solidFill>
+                    </a:lnB>
+                    <a:solidFill>
+                      <a:srgbClr val="FFFFFF"/>
+                    </a:solidFill>
+                  </a:tcPr>
+                </a:tc>
+                <a:tc>
+                  <a:txBody>
+                    <a:bodyPr lIns="9525" rIns="9525" tIns="6350" bIns="6350" anchor="ctr"/>
+                    <a:lstStyle/>
+                    <a:p>
+                      <a:pPr algn="ctr"/>
+                      <a:r>
+                        <a:rPr lang="ko-KR" sz="1100" b="0">
+                          <a:solidFill>
+                            <a:srgbClr val="333333"/>
+                          </a:solidFill>
+                        </a:rPr>
+                        <a:t>41</a:t>
+                      </a:r>
+                    </a:p>
+                  </a:txBody>
+                  <a:tcPr anchor="ctr" marL="0" marR="0" marT="0" marB="0">
+                    <a:lnL w="6350">
+                      <a:solidFill>
+                        <a:srgbClr val="BBBBBB"/>
+                      </a:solidFill>
+                    </a:lnL>
+                    <a:lnR w="6350">
+                      <a:solidFill>
+                        <a:srgbClr val="BBBBBB"/>
+                      </a:solidFill>
+                    </a:lnR>
+                    <a:lnT w="6350">
+                      <a:solidFill>
+                        <a:srgbClr val="BBBBBB"/>
+                      </a:solidFill>
+                    </a:lnT>
+                    <a:lnB w="6350">
+                      <a:solidFill>
+                        <a:srgbClr val="BBBBBB"/>
+                      </a:solidFill>
+                    </a:lnB>
+                    <a:solidFill>
+                      <a:srgbClr val="FFFFFF"/>
+                    </a:solidFill>
+                  </a:tcPr>
+                </a:tc>
+                <a:tc>
+                  <a:txBody>
+                    <a:bodyPr lIns="9525" rIns="9525" tIns="6350" bIns="6350" anchor="ctr"/>
+                    <a:lstStyle/>
+                    <a:p>
+                      <a:pPr algn="ctr"/>
+                      <a:r>
                         <a:rPr lang="ko-KR" sz="1100" b="1">
                           <a:solidFill>
                             <a:srgbClr val="FFFFFF"/>
                           </a:solidFill>
                         </a:rPr>
-                        <a:t>37</a:t>
+                        <a:t>42</a:t>
                       </a:r>
                     </a:p>
                   </a:txBody>
@@ -25576,216 +25777,6 @@
                     </a:lnB>
                     <a:solidFill>
                       <a:srgbClr val="C00000"/>
-                    </a:solidFill>
-                  </a:tcPr>
-                </a:tc>
-                <a:tc>
-                  <a:txBody>
-                    <a:bodyPr lIns="9525" rIns="9525" tIns="6350" bIns="6350" anchor="ctr"/>
-                    <a:lstStyle/>
-                    <a:p>
-                      <a:pPr algn="ctr"/>
-                      <a:r>
-                        <a:rPr lang="ko-KR" sz="1100" b="0">
-                          <a:solidFill>
-                            <a:srgbClr val="333333"/>
-                          </a:solidFill>
-                        </a:rPr>
-                        <a:t>38</a:t>
-                      </a:r>
-                    </a:p>
-                  </a:txBody>
-                  <a:tcPr anchor="ctr" marL="0" marR="0" marT="0" marB="0">
-                    <a:lnL w="6350">
-                      <a:solidFill>
-                        <a:srgbClr val="BBBBBB"/>
-                      </a:solidFill>
-                    </a:lnL>
-                    <a:lnR w="6350">
-                      <a:solidFill>
-                        <a:srgbClr val="BBBBBB"/>
-                      </a:solidFill>
-                    </a:lnR>
-                    <a:lnT w="6350">
-                      <a:solidFill>
-                        <a:srgbClr val="BBBBBB"/>
-                      </a:solidFill>
-                    </a:lnT>
-                    <a:lnB w="6350">
-                      <a:solidFill>
-                        <a:srgbClr val="BBBBBB"/>
-                      </a:solidFill>
-                    </a:lnB>
-                    <a:solidFill>
-                      <a:srgbClr val="FFFFFF"/>
-                    </a:solidFill>
-                  </a:tcPr>
-                </a:tc>
-                <a:tc>
-                  <a:txBody>
-                    <a:bodyPr lIns="9525" rIns="9525" tIns="6350" bIns="6350" anchor="ctr"/>
-                    <a:lstStyle/>
-                    <a:p>
-                      <a:pPr algn="ctr"/>
-                      <a:r>
-                        <a:rPr lang="ko-KR" sz="1100" b="0">
-                          <a:solidFill>
-                            <a:srgbClr val="333333"/>
-                          </a:solidFill>
-                        </a:rPr>
-                        <a:t>39</a:t>
-                      </a:r>
-                    </a:p>
-                  </a:txBody>
-                  <a:tcPr anchor="ctr" marL="0" marR="0" marT="0" marB="0">
-                    <a:lnL w="6350">
-                      <a:solidFill>
-                        <a:srgbClr val="BBBBBB"/>
-                      </a:solidFill>
-                    </a:lnL>
-                    <a:lnR w="6350">
-                      <a:solidFill>
-                        <a:srgbClr val="BBBBBB"/>
-                      </a:solidFill>
-                    </a:lnR>
-                    <a:lnT w="6350">
-                      <a:solidFill>
-                        <a:srgbClr val="BBBBBB"/>
-                      </a:solidFill>
-                    </a:lnT>
-                    <a:lnB w="6350">
-                      <a:solidFill>
-                        <a:srgbClr val="BBBBBB"/>
-                      </a:solidFill>
-                    </a:lnB>
-                    <a:solidFill>
-                      <a:srgbClr val="FFFFFF"/>
-                    </a:solidFill>
-                  </a:tcPr>
-                </a:tc>
-                <a:tc>
-                  <a:txBody>
-                    <a:bodyPr lIns="9525" rIns="9525" tIns="6350" bIns="6350" anchor="ctr"/>
-                    <a:lstStyle/>
-                    <a:p>
-                      <a:pPr algn="ctr"/>
-                      <a:r>
-                        <a:rPr lang="ko-KR" sz="1100" b="0">
-                          <a:solidFill>
-                            <a:srgbClr val="333333"/>
-                          </a:solidFill>
-                        </a:rPr>
-                        <a:t>40</a:t>
-                      </a:r>
-                    </a:p>
-                  </a:txBody>
-                  <a:tcPr anchor="ctr" marL="0" marR="0" marT="0" marB="0">
-                    <a:lnL w="6350">
-                      <a:solidFill>
-                        <a:srgbClr val="BBBBBB"/>
-                      </a:solidFill>
-                    </a:lnL>
-                    <a:lnR w="6350">
-                      <a:solidFill>
-                        <a:srgbClr val="BBBBBB"/>
-                      </a:solidFill>
-                    </a:lnR>
-                    <a:lnT w="6350">
-                      <a:solidFill>
-                        <a:srgbClr val="BBBBBB"/>
-                      </a:solidFill>
-                    </a:lnT>
-                    <a:lnB w="6350">
-                      <a:solidFill>
-                        <a:srgbClr val="BBBBBB"/>
-                      </a:solidFill>
-                    </a:lnB>
-                    <a:solidFill>
-                      <a:srgbClr val="FFFFFF"/>
-                    </a:solidFill>
-                  </a:tcPr>
-                </a:tc>
-                <a:tc>
-                  <a:txBody>
-                    <a:bodyPr lIns="9525" rIns="9525" tIns="6350" bIns="6350" anchor="ctr"/>
-                    <a:lstStyle/>
-                    <a:p>
-                      <a:pPr algn="ctr"/>
-                      <a:r>
-                        <a:rPr lang="ko-KR" sz="1100" b="0">
-                          <a:solidFill>
-                            <a:srgbClr val="333333"/>
-                          </a:solidFill>
-                        </a:rPr>
-                        <a:t>41</a:t>
-                      </a:r>
-                    </a:p>
-                  </a:txBody>
-                  <a:tcPr anchor="ctr" marL="0" marR="0" marT="0" marB="0">
-                    <a:lnL w="6350">
-                      <a:solidFill>
-                        <a:srgbClr val="BBBBBB"/>
-                      </a:solidFill>
-                    </a:lnL>
-                    <a:lnR w="6350">
-                      <a:solidFill>
-                        <a:srgbClr val="BBBBBB"/>
-                      </a:solidFill>
-                    </a:lnR>
-                    <a:lnT w="6350">
-                      <a:solidFill>
-                        <a:srgbClr val="BBBBBB"/>
-                      </a:solidFill>
-                    </a:lnT>
-                    <a:lnB w="6350">
-                      <a:solidFill>
-                        <a:srgbClr val="BBBBBB"/>
-                      </a:solidFill>
-                    </a:lnB>
-                    <a:solidFill>
-                      <a:srgbClr val="FFFFFF"/>
-                    </a:solidFill>
-                  </a:tcPr>
-                </a:tc>
-                <a:tc>
-                  <a:txBody>
-                    <a:bodyPr lIns="9525" rIns="9525" tIns="6350" bIns="6350" anchor="ctr"/>
-                    <a:lstStyle/>
-                    <a:p>
-                      <a:pPr algn="ctr"/>
-                      <a:r>
-                        <a:rPr lang="ko-KR" sz="1100" b="0">
-                          <a:solidFill>
-                            <a:srgbClr val="333333"/>
-                          </a:solidFill>
-                        </a:rPr>
-                        <a:t>42</a:t>
-                      </a:r>
-                    </a:p>
-                  </a:txBody>
-                  <a:tcPr anchor="ctr" marL="0" marR="0" marT="0" marB="0">
-                    <a:lnL w="6350">
-                      <a:solidFill>
-                        <a:srgbClr val="BBBBBB"/>
-                      </a:solidFill>
-                    </a:lnL>
-                    <a:lnR w="6350">
-                      <a:solidFill>
-                        <a:srgbClr val="BBBBBB"/>
-                      </a:solidFill>
-                    </a:lnR>
-                    <a:lnT w="6350">
-                      <a:solidFill>
-                        <a:srgbClr val="BBBBBB"/>
-                      </a:solidFill>
-                    </a:lnT>
-                    <a:lnB w="6350">
-                      <a:solidFill>
-                        <a:srgbClr val="BBBBBB"/>
-                      </a:solidFill>
-                    </a:lnB>
-                    <a:solidFill>
-                      <a:srgbClr val="FFFFFF"/>
                     </a:solidFill>
                   </a:tcPr>
                 </a:tc>
@@ -26084,7 +26075,7 @@
                   <a:srgbClr val="1F3864"/>
                 </a:solidFill>
               </a:rPr>
-              <a:t>15 23 24 31 34 37</a:t>
+              <a:t>21 23 24 25 30 42</a:t>
             </a:r>
           </a:p>
         </p:txBody>
@@ -26115,7 +26106,7 @@
                   <a:srgbClr val="808080"/>
                 </a:solidFill>
               </a:rPr>
-              <a:t>합 164 · 홀4:짝2</a:t>
+              <a:t>합 165 · 홀3:짝3</a:t>
             </a:r>
           </a:p>
         </p:txBody>
